--- a/presentation/Insurance_Claim_Prediction.pptx
+++ b/presentation/Insurance_Claim_Prediction.pptx
@@ -13,9 +13,11 @@
     <p:sldId id="261" r:id="rId7"/>
     <p:sldId id="262" r:id="rId8"/>
     <p:sldId id="263" r:id="rId9"/>
+    <p:sldId id="264" r:id="rId10"/>
+    <p:sldId id="265" r:id="rId11"/>
   </p:sldIdLst>
   <p:notesMasterIdLst>
-    <p:notesMasterId r:id="rId10"/>
+    <p:notesMasterId r:id="rId12"/>
   </p:notesMasterIdLst>
   <p:sldSz cx="9144000" cy="5143500"/>
   <p:notesSz cx="5143500" cy="9144000"/>
@@ -389,6 +391,299 @@
 </c:chartSpace>
 </file>
 
+<file path=ppt/charts/chart2.xml><?xml version="1.0" encoding="utf-8"?>
+<c:chartSpace xmlns:c="http://schemas.openxmlformats.org/drawingml/2006/chart" xmlns:a="http://schemas.openxmlformats.org/drawingml/2006/main" xmlns:r="http://schemas.openxmlformats.org/officeDocument/2006/relationships">
+  <c:date1904 val="0"/>
+  <c:roundedCorners val="1"/>
+  <c:chart>
+    <c:title>
+      <c:tx>
+        <c:rich>
+          <a:bodyPr/>
+          <a:lstStyle/>
+          <a:p>
+            <a:pPr>
+              <a:defRPr sz="1300" b="0" i="0" u="none" strike="noStrike">
+                <a:solidFill>
+                  <a:srgbClr val="1B2A41"/>
+                </a:solidFill>
+                <a:latin typeface="Arial"/>
+              </a:defRPr>
+            </a:pPr>
+            <a:r>
+              <a:rPr sz="1300" b="0" i="0" u="none" strike="noStrike">
+                <a:solidFill>
+                  <a:srgbClr val="1B2A41"/>
+                </a:solidFill>
+                <a:latin typeface="Arial"/>
+              </a:rPr>
+              <a:t>Correlation with claim (Pearson)</a:t>
+            </a:r>
+          </a:p>
+        </c:rich>
+      </c:tx>
+      <c:layout/>
+      <c:overlay val="0"/>
+    </c:title>
+    <c:autoTitleDeleted val="0"/>
+    <c:plotArea>
+      <c:layout/>
+      <c:barChart>
+        <c:barDir val="bar"/>
+        <c:grouping val="clustered"/>
+        <c:varyColors val="0"/>
+        <c:ser>
+          <c:idx val="0"/>
+          <c:order val="0"/>
+          <c:tx>
+            <c:strRef>
+              <c:f>Sheet1!$B$1</c:f>
+              <c:strCache>
+                <c:ptCount val="1"/>
+                <c:pt idx="0">
+                  <c:v>Correlation with claim</c:v>
+                </c:pt>
+              </c:strCache>
+            </c:strRef>
+          </c:tx>
+          <c:spPr>
+            <a:solidFill>
+              <a:srgbClr val="0F8B8D"/>
+            </a:solidFill>
+            <a:effectLst/>
+          </c:spPr>
+          <c:invertIfNegative val="0"/>
+          <c:dLbls>
+            <c:numFmt formatCode="0.00" sourceLinked="0"/>
+            <c:txPr>
+              <a:bodyPr/>
+              <a:lstStyle/>
+              <a:p>
+                <a:pPr>
+                  <a:defRPr b="0" i="0" strike="noStrike" sz="1100" u="none">
+                    <a:solidFill>
+                      <a:srgbClr val="2B3440"/>
+                    </a:solidFill>
+                    <a:latin typeface="Arial"/>
+                  </a:defRPr>
+                </a:pPr>
+              </a:p>
+            </c:txPr>
+            <c:showLegendKey val="0"/>
+            <c:showVal val="1"/>
+            <c:showCatName val="0"/>
+            <c:showSerName val="0"/>
+            <c:showPercent val="0"/>
+            <c:showBubbleSize val="0"/>
+            <c:showLeaderLines val="0"/>
+          </c:dLbls>
+          <c:cat>
+            <c:multiLvlStrRef>
+              <c:f>Sheet1!$A$2:$A$8</c:f>
+              <c:multiLvlStrCache>
+                <c:ptCount val="7"/>
+                <c:lvl>
+                  <c:pt idx="0">
+                    <c:v>children</c:v>
+                  </c:pt>
+                  <c:pt idx="1">
+                    <c:v>bmi</c:v>
+                  </c:pt>
+                  <c:pt idx="2">
+                    <c:v>smoker</c:v>
+                  </c:pt>
+                  <c:pt idx="3">
+                    <c:v>charges</c:v>
+                  </c:pt>
+                  <c:pt idx="4">
+                    <c:v>age</c:v>
+                  </c:pt>
+                  <c:pt idx="5">
+                    <c:v>sex</c:v>
+                  </c:pt>
+                  <c:pt idx="6">
+                    <c:v>region</c:v>
+                  </c:pt>
+                </c:lvl>
+              </c:multiLvlStrCache>
+            </c:multiLvlStrRef>
+          </c:cat>
+          <c:val>
+            <c:numRef>
+              <c:f>Sheet1!$B$2:$B$8</c:f>
+              <c:numCache>
+                <c:formatCode>General</c:formatCode>
+                <c:ptCount val="7"/>
+                <c:pt idx="0">
+                  <c:v>-0.41</c:v>
+                </c:pt>
+                <c:pt idx="1">
+                  <c:v>0.38</c:v>
+                </c:pt>
+                <c:pt idx="2">
+                  <c:v>0.33</c:v>
+                </c:pt>
+                <c:pt idx="3">
+                  <c:v>0.31</c:v>
+                </c:pt>
+                <c:pt idx="4">
+                  <c:v>0.11</c:v>
+                </c:pt>
+                <c:pt idx="5">
+                  <c:v>0.03</c:v>
+                </c:pt>
+                <c:pt idx="6">
+                  <c:v>0.02</c:v>
+                </c:pt>
+              </c:numCache>
+            </c:numRef>
+          </c:val>
+        </c:ser>
+        <c:dLbls>
+          <c:numFmt formatCode="0.00" sourceLinked="0"/>
+          <c:txPr>
+            <a:bodyPr/>
+            <a:lstStyle/>
+            <a:p>
+              <a:pPr>
+                <a:defRPr b="0" i="0" strike="noStrike" sz="1100" u="none">
+                  <a:solidFill>
+                    <a:srgbClr val="2B3440"/>
+                  </a:solidFill>
+                  <a:latin typeface="Arial"/>
+                </a:defRPr>
+              </a:pPr>
+            </a:p>
+          </c:txPr>
+          <c:showLegendKey val="0"/>
+          <c:showVal val="1"/>
+          <c:showCatName val="0"/>
+          <c:showSerName val="0"/>
+          <c:showPercent val="0"/>
+          <c:showBubbleSize val="0"/>
+          <c:showLeaderLines val="0"/>
+        </c:dLbls>
+        <c:gapWidth val="150"/>
+        <c:overlap val="0"/>
+        <c:axId val="2094734554"/>
+        <c:axId val="2094734552"/>
+        <c:axId val="2094734556"/>
+      </c:barChart>
+      <c:catAx>
+        <c:axId val="2094734554"/>
+        <c:scaling>
+          <c:orientation val="maxMin"/>
+        </c:scaling>
+        <c:delete val="0"/>
+        <c:axPos val="l"/>
+        <c:numFmt formatCode="General" sourceLinked="1"/>
+        <c:majorTickMark val="out"/>
+        <c:minorTickMark val="none"/>
+        <c:tickLblPos val="low"/>
+        <c:spPr>
+          <a:ln w="12700" cap="flat">
+            <a:solidFill>
+              <a:srgbClr val="888888"/>
+            </a:solidFill>
+            <a:prstDash val="solid"/>
+            <a:round/>
+          </a:ln>
+        </c:spPr>
+        <c:txPr>
+          <a:bodyPr/>
+          <a:lstStyle/>
+          <a:p>
+            <a:pPr>
+              <a:defRPr sz="1100" b="0" i="0" u="none" strike="noStrike">
+                <a:solidFill>
+                  <a:srgbClr val="5C6B7A"/>
+                </a:solidFill>
+                <a:latin typeface="Arial"/>
+              </a:defRPr>
+            </a:pPr>
+            <a:endParaRPr lang="en-US"/>
+          </a:p>
+        </c:txPr>
+        <c:crossAx val="2094734552"/>
+        <c:crosses val="autoZero"/>
+        <c:auto val="1"/>
+        <c:lblAlgn val="ctr"/>
+        <c:noMultiLvlLbl val="1"/>
+      </c:catAx>
+      <c:valAx>
+        <c:axId val="2094734552"/>
+        <c:scaling>
+          <c:orientation val="minMax"/>
+        </c:scaling>
+        <c:delete val="0"/>
+        <c:axPos val="b"/>
+        <c:majorGridlines>
+          <c:spPr>
+            <a:ln w="6350" cap="flat">
+              <a:solidFill>
+                <a:srgbClr val="E3E8EE"/>
+              </a:solidFill>
+              <a:prstDash val="solid"/>
+              <a:round/>
+            </a:ln>
+          </c:spPr>
+        </c:majorGridlines>
+        <c:numFmt formatCode="General" sourceLinked="0"/>
+        <c:majorTickMark val="out"/>
+        <c:minorTickMark val="none"/>
+        <c:tickLblPos val="low"/>
+        <c:spPr>
+          <a:ln w="12700" cap="flat">
+            <a:solidFill>
+              <a:srgbClr val="888888"/>
+            </a:solidFill>
+            <a:prstDash val="solid"/>
+            <a:round/>
+          </a:ln>
+        </c:spPr>
+        <c:txPr>
+          <a:bodyPr/>
+          <a:lstStyle/>
+          <a:p>
+            <a:pPr>
+              <a:defRPr sz="1000" b="0" i="0" u="none" strike="noStrike">
+                <a:solidFill>
+                  <a:srgbClr val="5C6B7A"/>
+                </a:solidFill>
+                <a:latin typeface="Arial"/>
+              </a:defRPr>
+            </a:pPr>
+            <a:endParaRPr lang="en-US"/>
+          </a:p>
+        </c:txPr>
+        <c:crossAx val="2094734554"/>
+        <c:crosses val="autoZero"/>
+        <c:crossBetween val="between"/>
+      </c:valAx>
+      <c:spPr>
+        <a:noFill/>
+        <a:ln>
+          <a:noFill/>
+        </a:ln>
+        <a:effectLst/>
+      </c:spPr>
+    </c:plotArea>
+    <c:plotVisOnly val="1"/>
+    <c:dispBlanksAs val="span"/>
+  </c:chart>
+  <c:spPr>
+    <a:noFill/>
+    <a:ln>
+      <a:noFill/>
+    </a:ln>
+    <a:effectLst/>
+  </c:spPr>
+  <c:externalData r:id="rId1">
+    <c:autoUpdate val="0"/>
+  </c:externalData>
+</c:chartSpace>
+</file>
+
 <file path=ppt/notesMasters/notesMaster1.xml><?xml version="1.0" encoding="utf-8"?>
 <p:notesMaster xmlns:a="http://schemas.openxmlformats.org/drawingml/2006/main" xmlns:r="http://schemas.openxmlformats.org/officeDocument/2006/relationships" xmlns:p="http://schemas.openxmlformats.org/presentationml/2006/main">
   <p:cSld>
@@ -826,6 +1121,94 @@
 </p:notes>
 </file>
 
+<file path=ppt/notesSlides/notesSlide10.xml><?xml version="1.0" encoding="utf-8"?>
+<p:notes xmlns:a="http://schemas.openxmlformats.org/drawingml/2006/main" xmlns:r="http://schemas.openxmlformats.org/officeDocument/2006/relationships" xmlns:p="http://schemas.openxmlformats.org/presentationml/2006/main">
+  <p:cSld>
+    <p:spTree>
+      <p:nvGrpSpPr>
+        <p:cNvPr id="1" name=""/>
+        <p:cNvGrpSpPr/>
+        <p:nvPr/>
+      </p:nvGrpSpPr>
+      <p:grpSpPr>
+        <a:xfrm>
+          <a:off x="0" y="0"/>
+          <a:ext cx="0" cy="0"/>
+          <a:chOff x="0" y="0"/>
+          <a:chExt cx="0" cy="0"/>
+        </a:xfrm>
+      </p:grpSpPr>
+      <p:sp>
+        <p:nvSpPr>
+          <p:cNvPr id="2" name="Slide Image Placeholder 1"/>
+          <p:cNvSpPr>
+            <a:spLocks noGrp="1" noRot="1" noChangeAspect="1"/>
+          </p:cNvSpPr>
+          <p:nvPr>
+            <p:ph type="sldImg"/>
+          </p:nvPr>
+        </p:nvSpPr>
+        <p:spPr/>
+      </p:sp>
+      <p:sp>
+        <p:nvSpPr>
+          <p:cNvPr id="3" name="Notes Placeholder 2"/>
+          <p:cNvSpPr>
+            <a:spLocks noGrp="1"/>
+          </p:cNvSpPr>
+          <p:nvPr>
+            <p:ph type="body" idx="1"/>
+          </p:nvPr>
+        </p:nvSpPr>
+        <p:spPr/>
+        <p:txBody>
+          <a:bodyPr/>
+          <a:lstStyle/>
+          <a:p>
+            <a:r>
+              <a:rPr lang="en-US" dirty="0"/>
+              <a:t/>
+            </a:r>
+            <a:endParaRPr lang="en-US" dirty="0"/>
+          </a:p>
+        </p:txBody>
+      </p:sp>
+      <p:sp>
+        <p:nvSpPr>
+          <p:cNvPr id="4" name="Slide Number Placeholder 3"/>
+          <p:cNvSpPr>
+            <a:spLocks noGrp="1"/>
+          </p:cNvSpPr>
+          <p:nvPr>
+            <p:ph type="sldNum" sz="quarter" idx="10"/>
+          </p:nvPr>
+        </p:nvSpPr>
+        <p:spPr/>
+        <p:txBody>
+          <a:bodyPr/>
+          <a:lstStyle/>
+          <a:p>
+            <a:fld id="{F7021451-1387-4CA6-816F-3879F97B5CBC}" type="slidenum">
+              <a:rPr lang="en-US"/>
+              <a:t>10</a:t>
+            </a:fld>
+            <a:endParaRPr lang="en-US"/>
+          </a:p>
+        </p:txBody>
+      </p:sp>
+    </p:spTree>
+    <p:extLst>
+      <p:ext uri="{BB962C8B-B14F-4D97-AF65-F5344CB8AC3E}">
+        <p14:creationId xmlns:p14="http://schemas.microsoft.com/office/powerpoint/2010/main" val="1024086991"/>
+      </p:ext>
+    </p:extLst>
+  </p:cSld>
+  <p:clrMapOvr>
+    <a:masterClrMapping/>
+  </p:clrMapOvr>
+</p:notes>
+</file>
+
 <file path=ppt/notesSlides/notesSlide2.xml><?xml version="1.0" encoding="utf-8"?>
 <p:notes xmlns:a="http://schemas.openxmlformats.org/drawingml/2006/main" xmlns:r="http://schemas.openxmlformats.org/officeDocument/2006/relationships" xmlns:p="http://schemas.openxmlformats.org/presentationml/2006/main">
   <p:cSld>
@@ -1424,6 +1807,94 @@
             <a:fld id="{F7021451-1387-4CA6-816F-3879F97B5CBC}" type="slidenum">
               <a:rPr lang="en-US"/>
               <a:t>8</a:t>
+            </a:fld>
+            <a:endParaRPr lang="en-US"/>
+          </a:p>
+        </p:txBody>
+      </p:sp>
+    </p:spTree>
+    <p:extLst>
+      <p:ext uri="{BB962C8B-B14F-4D97-AF65-F5344CB8AC3E}">
+        <p14:creationId xmlns:p14="http://schemas.microsoft.com/office/powerpoint/2010/main" val="1024086991"/>
+      </p:ext>
+    </p:extLst>
+  </p:cSld>
+  <p:clrMapOvr>
+    <a:masterClrMapping/>
+  </p:clrMapOvr>
+</p:notes>
+</file>
+
+<file path=ppt/notesSlides/notesSlide9.xml><?xml version="1.0" encoding="utf-8"?>
+<p:notes xmlns:a="http://schemas.openxmlformats.org/drawingml/2006/main" xmlns:r="http://schemas.openxmlformats.org/officeDocument/2006/relationships" xmlns:p="http://schemas.openxmlformats.org/presentationml/2006/main">
+  <p:cSld>
+    <p:spTree>
+      <p:nvGrpSpPr>
+        <p:cNvPr id="1" name=""/>
+        <p:cNvGrpSpPr/>
+        <p:nvPr/>
+      </p:nvGrpSpPr>
+      <p:grpSpPr>
+        <a:xfrm>
+          <a:off x="0" y="0"/>
+          <a:ext cx="0" cy="0"/>
+          <a:chOff x="0" y="0"/>
+          <a:chExt cx="0" cy="0"/>
+        </a:xfrm>
+      </p:grpSpPr>
+      <p:sp>
+        <p:nvSpPr>
+          <p:cNvPr id="2" name="Slide Image Placeholder 1"/>
+          <p:cNvSpPr>
+            <a:spLocks noGrp="1" noRot="1" noChangeAspect="1"/>
+          </p:cNvSpPr>
+          <p:nvPr>
+            <p:ph type="sldImg"/>
+          </p:nvPr>
+        </p:nvSpPr>
+        <p:spPr/>
+      </p:sp>
+      <p:sp>
+        <p:nvSpPr>
+          <p:cNvPr id="3" name="Notes Placeholder 2"/>
+          <p:cNvSpPr>
+            <a:spLocks noGrp="1"/>
+          </p:cNvSpPr>
+          <p:nvPr>
+            <p:ph type="body" idx="1"/>
+          </p:nvPr>
+        </p:nvSpPr>
+        <p:spPr/>
+        <p:txBody>
+          <a:bodyPr/>
+          <a:lstStyle/>
+          <a:p>
+            <a:r>
+              <a:rPr lang="en-US" dirty="0"/>
+              <a:t/>
+            </a:r>
+            <a:endParaRPr lang="en-US" dirty="0"/>
+          </a:p>
+        </p:txBody>
+      </p:sp>
+      <p:sp>
+        <p:nvSpPr>
+          <p:cNvPr id="4" name="Slide Number Placeholder 3"/>
+          <p:cNvSpPr>
+            <a:spLocks noGrp="1"/>
+          </p:cNvSpPr>
+          <p:nvPr>
+            <p:ph type="sldNum" sz="quarter" idx="10"/>
+          </p:nvPr>
+        </p:nvSpPr>
+        <p:spPr/>
+        <p:txBody>
+          <a:bodyPr/>
+          <a:lstStyle/>
+          <a:p>
+            <a:fld id="{F7021451-1387-4CA6-816F-3879F97B5CBC}" type="slidenum">
+              <a:rPr lang="en-US"/>
+              <a:t>9</a:t>
             </a:fld>
             <a:endParaRPr lang="en-US"/>
           </a:p>
@@ -1884,6 +2355,229 @@
 </p:sld>
 </file>
 
+<file path=ppt/slides/slide10.xml><?xml version="1.0" encoding="utf-8"?>
+<p:sld xmlns:a="http://schemas.openxmlformats.org/drawingml/2006/main" xmlns:r="http://schemas.openxmlformats.org/officeDocument/2006/relationships" xmlns:p="http://schemas.openxmlformats.org/presentationml/2006/main">
+  <p:cSld name="Slide 10">
+    <p:bg>
+      <p:bgPr>
+        <a:solidFill>
+          <a:srgbClr val="FFFFFF"/>
+        </a:solidFill>
+      </p:bgPr>
+    </p:bg>
+    <p:spTree>
+      <p:nvGrpSpPr>
+        <p:cNvPr id="1" name=""/>
+        <p:cNvGrpSpPr/>
+        <p:nvPr/>
+      </p:nvGrpSpPr>
+      <p:grpSpPr>
+        <a:xfrm>
+          <a:off x="0" y="0"/>
+          <a:ext cx="0" cy="0"/>
+          <a:chOff x="0" y="0"/>
+          <a:chExt cx="0" cy="0"/>
+        </a:xfrm>
+      </p:grpSpPr>
+      <p:sp>
+        <p:nvSpPr>
+          <p:cNvPr id="2" name="Shape 0"/>
+          <p:cNvSpPr/>
+          <p:nvPr/>
+        </p:nvSpPr>
+        <p:spPr>
+          <a:xfrm>
+            <a:off x="0" y="0"/>
+            <a:ext cx="164592" cy="5143500"/>
+          </a:xfrm>
+          <a:prstGeom prst="rect">
+            <a:avLst/>
+          </a:prstGeom>
+          <a:solidFill>
+            <a:srgbClr val="0F8B8D"/>
+          </a:solidFill>
+          <a:ln w="12700">
+            <a:solidFill>
+              <a:srgbClr val="0F8B8D"/>
+            </a:solidFill>
+            <a:prstDash val="solid"/>
+          </a:ln>
+        </p:spPr>
+      </p:sp>
+      <p:sp>
+        <p:nvSpPr>
+          <p:cNvPr id="3" name="Text 1"/>
+          <p:cNvSpPr txBox="1"/>
+          <p:nvPr/>
+        </p:nvSpPr>
+        <p:spPr>
+          <a:xfrm>
+            <a:off x="548640" y="274320"/>
+            <a:ext cx="8046720" cy="640080"/>
+          </a:xfrm>
+          <a:prstGeom prst="rect">
+            <a:avLst/>
+          </a:prstGeom>
+          <a:noFill/>
+          <a:ln/>
+        </p:spPr>
+        <p:txBody>
+          <a:bodyPr wrap="square" lIns="0" tIns="0" rIns="0" bIns="0" rtlCol="0" anchor="ctr"/>
+          <a:lstStyle/>
+          <a:p>
+            <a:pPr indent="0" marL="0">
+              <a:buNone/>
+            </a:pPr>
+            <a:r>
+              <a:rPr lang="en-US" sz="2800" b="1" dirty="0">
+                <a:solidFill>
+                  <a:srgbClr val="1B2A41"/>
+                </a:solidFill>
+                <a:latin typeface="Calibri" pitchFamily="34" charset="0"/>
+                <a:ea typeface="Calibri" pitchFamily="34" charset="-122"/>
+                <a:cs typeface="Calibri" pitchFamily="34" charset="-120"/>
+              </a:rPr>
+              <a:t>Key takeaways and next steps</a:t>
+            </a:r>
+            <a:endParaRPr lang="en-US" sz="2800" dirty="0"/>
+          </a:p>
+        </p:txBody>
+      </p:sp>
+      <p:sp>
+        <p:nvSpPr>
+          <p:cNvPr id="4" name="Text 2"/>
+          <p:cNvSpPr txBox="1"/>
+          <p:nvPr/>
+        </p:nvSpPr>
+        <p:spPr>
+          <a:xfrm>
+            <a:off x="548640" y="1097280"/>
+            <a:ext cx="8046720" cy="3474720"/>
+          </a:xfrm>
+          <a:prstGeom prst="rect">
+            <a:avLst/>
+          </a:prstGeom>
+          <a:noFill/>
+          <a:ln/>
+        </p:spPr>
+        <p:txBody>
+          <a:bodyPr wrap="square" rtlCol="0" anchor="t"/>
+          <a:lstStyle/>
+          <a:p>
+            <a:pPr marL="342900" indent="-342900">
+              <a:spcAft>
+                <a:spcPts val="800"/>
+              </a:spcAft>
+              <a:buSzPct val="100000"/>
+              <a:buChar char="•"/>
+            </a:pPr>
+            <a:r>
+              <a:rPr lang="en-US" sz="1700" dirty="0">
+                <a:solidFill>
+                  <a:srgbClr val="2B3440"/>
+                </a:solidFill>
+                <a:latin typeface="Calibri" pitchFamily="34" charset="0"/>
+                <a:ea typeface="Calibri" pitchFamily="34" charset="-122"/>
+                <a:cs typeface="Calibri" pitchFamily="34" charset="-120"/>
+              </a:rPr>
+              <a:t>End-to-end distributed pipeline: CSV to HDFS to Hive to PySpark to Parquet results.</a:t>
+            </a:r>
+            <a:endParaRPr lang="en-US" sz="1700" dirty="0"/>
+          </a:p>
+          <a:p>
+            <a:pPr marL="342900" indent="-342900">
+              <a:spcAft>
+                <a:spcPts val="800"/>
+              </a:spcAft>
+              <a:buSzPct val="100000"/>
+              <a:buChar char="•"/>
+            </a:pPr>
+            <a:r>
+              <a:rPr lang="en-US" sz="1700" dirty="0">
+                <a:solidFill>
+                  <a:srgbClr val="2B3440"/>
+                </a:solidFill>
+                <a:latin typeface="Calibri" pitchFamily="34" charset="0"/>
+                <a:ea typeface="Calibri" pitchFamily="34" charset="-122"/>
+                <a:cs typeface="Calibri" pitchFamily="34" charset="-120"/>
+              </a:rPr>
+              <a:t>Smoking status is the clearest risk signal in the data, linked to both claim rate and cost.</a:t>
+            </a:r>
+            <a:endParaRPr lang="en-US" sz="1700" dirty="0"/>
+          </a:p>
+          <a:p>
+            <a:pPr marL="342900" indent="-342900">
+              <a:spcAft>
+                <a:spcPts val="800"/>
+              </a:spcAft>
+              <a:buSzPct val="100000"/>
+              <a:buChar char="•"/>
+            </a:pPr>
+            <a:r>
+              <a:rPr lang="en-US" sz="1700" dirty="0">
+                <a:solidFill>
+                  <a:srgbClr val="2B3440"/>
+                </a:solidFill>
+                <a:latin typeface="Calibri" pitchFamily="34" charset="0"/>
+                <a:ea typeface="Calibri" pitchFamily="34" charset="-122"/>
+                <a:cs typeface="Calibri" pitchFamily="34" charset="-120"/>
+              </a:rPr>
+              <a:t>Check for leakage: charges is used as a feature, and may be a consequence of a claim rather than a predictor.</a:t>
+            </a:r>
+            <a:endParaRPr lang="en-US" sz="1700" dirty="0"/>
+          </a:p>
+          <a:p>
+            <a:pPr marL="342900" indent="-342900">
+              <a:spcAft>
+                <a:spcPts val="800"/>
+              </a:spcAft>
+              <a:buSzPct val="100000"/>
+              <a:buChar char="•"/>
+            </a:pPr>
+            <a:r>
+              <a:rPr lang="en-US" sz="1700" dirty="0">
+                <a:solidFill>
+                  <a:srgbClr val="2B3440"/>
+                </a:solidFill>
+                <a:latin typeface="Calibri" pitchFamily="34" charset="0"/>
+                <a:ea typeface="Calibri" pitchFamily="34" charset="-122"/>
+                <a:cs typeface="Calibri" pitchFamily="34" charset="-120"/>
+              </a:rPr>
+              <a:t>Improve the baseline: scale features, one-hot encode region, try tree-based models and cross-validation.</a:t>
+            </a:r>
+            <a:endParaRPr lang="en-US" sz="1700" dirty="0"/>
+          </a:p>
+          <a:p>
+            <a:pPr marL="342900" indent="-342900">
+              <a:spcAft>
+                <a:spcPts val="800"/>
+              </a:spcAft>
+              <a:buSzPct val="100000"/>
+              <a:buChar char="•"/>
+            </a:pPr>
+            <a:r>
+              <a:rPr lang="en-US" sz="1700" dirty="0">
+                <a:solidFill>
+                  <a:srgbClr val="2B3440"/>
+                </a:solidFill>
+                <a:latin typeface="Calibri" pitchFamily="34" charset="0"/>
+                <a:ea typeface="Calibri" pitchFamily="34" charset="-122"/>
+                <a:cs typeface="Calibri" pitchFamily="34" charset="-120"/>
+              </a:rPr>
+              <a:t>Report the test AUC and coefficients after running the script in the cluster.</a:t>
+            </a:r>
+            <a:endParaRPr lang="en-US" sz="1700" dirty="0"/>
+          </a:p>
+        </p:txBody>
+      </p:sp>
+    </p:spTree>
+  </p:cSld>
+  <p:clrMapOvr>
+    <a:masterClrMapping/>
+  </p:clrMapOvr>
+</p:sld>
+</file>
+
 <file path=ppt/slides/slide2.xml><?xml version="1.0" encoding="utf-8"?>
 <p:sld xmlns:a="http://schemas.openxmlformats.org/drawingml/2006/main" xmlns:r="http://schemas.openxmlformats.org/officeDocument/2006/relationships" xmlns:p="http://schemas.openxmlformats.org/presentationml/2006/main">
   <p:cSld name="Slide 2">
@@ -3887,72 +4581,38 @@
                 <a:ea typeface="Calibri" pitchFamily="34" charset="-122"/>
                 <a:cs typeface="Calibri" pitchFamily="34" charset="-120"/>
               </a:rPr>
-              <a:t>PySpark ML pipeline</a:t>
+              <a:t>Which features relate to claims?</a:t>
             </a:r>
             <a:endParaRPr lang="en-US" sz="2800" dirty="0"/>
           </a:p>
         </p:txBody>
       </p:sp>
-      <p:sp>
-        <p:nvSpPr>
-          <p:cNvPr id="4" name="Shape 2"/>
-          <p:cNvSpPr/>
-          <p:nvPr/>
-        </p:nvSpPr>
-        <p:spPr>
-          <a:xfrm>
-            <a:off x="548640" y="1097280"/>
-            <a:ext cx="3931920" cy="1005840"/>
-          </a:xfrm>
-          <a:prstGeom prst="rect">
-            <a:avLst/>
-          </a:prstGeom>
-          <a:solidFill>
-            <a:srgbClr val="F4F7FA"/>
-          </a:solidFill>
-          <a:ln w="12700">
-            <a:solidFill>
-              <a:srgbClr val="F4F7FA"/>
-            </a:solidFill>
-            <a:prstDash val="solid"/>
-          </a:ln>
-        </p:spPr>
-      </p:sp>
-      <p:sp>
-        <p:nvSpPr>
-          <p:cNvPr id="5" name="Shape 3"/>
-          <p:cNvSpPr/>
-          <p:nvPr/>
-        </p:nvSpPr>
-        <p:spPr>
-          <a:xfrm>
-            <a:off x="685800" y="1371600"/>
-            <a:ext cx="457200" cy="457200"/>
-          </a:xfrm>
-          <a:prstGeom prst="ellipse">
-            <a:avLst/>
-          </a:prstGeom>
-          <a:solidFill>
-            <a:srgbClr val="0F8B8D"/>
-          </a:solidFill>
-          <a:ln w="12700">
-            <a:solidFill>
-              <a:srgbClr val="0F8B8D"/>
-            </a:solidFill>
-            <a:prstDash val="solid"/>
-          </a:ln>
-        </p:spPr>
-      </p:sp>
-      <p:sp>
-        <p:nvSpPr>
-          <p:cNvPr id="6" name="Text 4"/>
+      <p:graphicFrame>
+        <p:nvGraphicFramePr>
+          <p:cNvPr id="4" name="Chart 0" descr=""/>
+          <p:cNvGraphicFramePr/>
+          <p:nvPr/>
+        </p:nvGraphicFramePr>
+        <p:xfrm>
+          <a:off x="457200" y="1005840"/>
+          <a:ext cx="5120640" cy="3566160"/>
+        </p:xfrm>
+        <a:graphic xmlns:a="http://schemas.openxmlformats.org/drawingml/2006/main">
+          <a:graphicData uri="http://schemas.openxmlformats.org/drawingml/2006/chart">
+            <c:chart xmlns:c="http://schemas.openxmlformats.org/drawingml/2006/chart" r:id="rId1"/>
+          </a:graphicData>
+        </a:graphic>
+      </p:graphicFrame>
+      <p:sp>
+        <p:nvSpPr>
+          <p:cNvPr id="5" name="Text 2"/>
           <p:cNvSpPr txBox="1"/>
           <p:nvPr/>
         </p:nvSpPr>
         <p:spPr>
           <a:xfrm>
-            <a:off x="685800" y="1371600"/>
-            <a:ext cx="457200" cy="457200"/>
+            <a:off x="5760720" y="1188720"/>
+            <a:ext cx="3017520" cy="3383280"/>
           </a:xfrm>
           <a:prstGeom prst="rect">
             <a:avLst/>
@@ -3961,70 +4621,18 @@
           <a:ln/>
         </p:spPr>
         <p:txBody>
-          <a:bodyPr wrap="square" lIns="0" tIns="0" rIns="0" bIns="0" rtlCol="0" anchor="ctr"/>
-          <a:lstStyle/>
-          <a:p>
-            <a:pPr algn="ctr" indent="0" marL="0">
-              <a:buNone/>
-            </a:pPr>
-            <a:r>
-              <a:rPr lang="en-US" sz="1600" b="1" dirty="0">
-                <a:solidFill>
-                  <a:srgbClr val="FFFFFF"/>
-                </a:solidFill>
-                <a:latin typeface="Calibri" pitchFamily="34" charset="0"/>
-                <a:ea typeface="Calibri" pitchFamily="34" charset="-122"/>
-                <a:cs typeface="Calibri" pitchFamily="34" charset="-120"/>
-              </a:rPr>
-              <a:t>1</a:t>
-            </a:r>
-            <a:endParaRPr lang="en-US" sz="1600" dirty="0"/>
-          </a:p>
-        </p:txBody>
-      </p:sp>
-      <p:sp>
-        <p:nvSpPr>
-          <p:cNvPr id="7" name="Text 5"/>
-          <p:cNvSpPr txBox="1"/>
-          <p:nvPr/>
-        </p:nvSpPr>
-        <p:spPr>
-          <a:xfrm>
-            <a:off x="1280160" y="1097280"/>
-            <a:ext cx="3108960" cy="1005840"/>
-          </a:xfrm>
-          <a:prstGeom prst="rect">
-            <a:avLst/>
-          </a:prstGeom>
-          <a:noFill/>
-          <a:ln/>
-        </p:spPr>
-        <p:txBody>
-          <a:bodyPr wrap="square" lIns="0" tIns="0" rIns="0" bIns="0" rtlCol="0" anchor="ctr"/>
-          <a:lstStyle/>
-          <a:p>
-            <a:pPr indent="0" marL="0">
-              <a:buNone/>
-            </a:pPr>
-            <a:r>
-              <a:rPr lang="en-US" sz="1400" b="1" dirty="0">
-                <a:solidFill>
-                  <a:srgbClr val="1B2A41"/>
-                </a:solidFill>
-                <a:latin typeface="Calibri" pitchFamily="34" charset="0"/>
-                <a:ea typeface="Calibri" pitchFamily="34" charset="-122"/>
-                <a:cs typeface="Calibri" pitchFamily="34" charset="-120"/>
-              </a:rPr>
-              <a:t>Load</a:t>
-            </a:r>
-            <a:endParaRPr lang="en-US" sz="1400" dirty="0"/>
-          </a:p>
-          <a:p>
-            <a:pPr indent="0" marL="0">
-              <a:buNone/>
-            </a:pPr>
-            <a:r>
-              <a:rPr lang="en-US" sz="1100" dirty="0">
+          <a:bodyPr wrap="square" rtlCol="0" anchor="t"/>
+          <a:lstStyle/>
+          <a:p>
+            <a:pPr marL="342900" indent="-342900">
+              <a:spcAft>
+                <a:spcPts val="800"/>
+              </a:spcAft>
+              <a:buSzPct val="100000"/>
+              <a:buChar char="•"/>
+            </a:pPr>
+            <a:r>
+              <a:rPr lang="en-US" sz="1300" dirty="0">
                 <a:solidFill>
                   <a:srgbClr val="2B3440"/>
                 </a:solidFill>
@@ -4032,144 +4640,20 @@
                 <a:ea typeface="Calibri" pitchFamily="34" charset="-122"/>
                 <a:cs typeface="Calibri" pitchFamily="34" charset="-120"/>
               </a:rPr>
-              <a:t>Read Insurance.csv from hdfs://namenode:9000 with header and inferred schema</a:t>
-            </a:r>
-            <a:endParaRPr lang="en-US" sz="1400" dirty="0"/>
-          </a:p>
-        </p:txBody>
-      </p:sp>
-      <p:sp>
-        <p:nvSpPr>
-          <p:cNvPr id="8" name="Shape 6"/>
-          <p:cNvSpPr/>
-          <p:nvPr/>
-        </p:nvSpPr>
-        <p:spPr>
-          <a:xfrm>
-            <a:off x="4663440" y="1097280"/>
-            <a:ext cx="3931920" cy="1005840"/>
-          </a:xfrm>
-          <a:prstGeom prst="rect">
-            <a:avLst/>
-          </a:prstGeom>
-          <a:solidFill>
-            <a:srgbClr val="F4F7FA"/>
-          </a:solidFill>
-          <a:ln w="12700">
-            <a:solidFill>
-              <a:srgbClr val="F4F7FA"/>
-            </a:solidFill>
-            <a:prstDash val="solid"/>
-          </a:ln>
-        </p:spPr>
-      </p:sp>
-      <p:sp>
-        <p:nvSpPr>
-          <p:cNvPr id="9" name="Shape 7"/>
-          <p:cNvSpPr/>
-          <p:nvPr/>
-        </p:nvSpPr>
-        <p:spPr>
-          <a:xfrm>
-            <a:off x="4800600" y="1371600"/>
-            <a:ext cx="457200" cy="457200"/>
-          </a:xfrm>
-          <a:prstGeom prst="ellipse">
-            <a:avLst/>
-          </a:prstGeom>
-          <a:solidFill>
-            <a:srgbClr val="0F8B8D"/>
-          </a:solidFill>
-          <a:ln w="12700">
-            <a:solidFill>
-              <a:srgbClr val="0F8B8D"/>
-            </a:solidFill>
-            <a:prstDash val="solid"/>
-          </a:ln>
-        </p:spPr>
-      </p:sp>
-      <p:sp>
-        <p:nvSpPr>
-          <p:cNvPr id="10" name="Text 8"/>
-          <p:cNvSpPr txBox="1"/>
-          <p:nvPr/>
-        </p:nvSpPr>
-        <p:spPr>
-          <a:xfrm>
-            <a:off x="4800600" y="1371600"/>
-            <a:ext cx="457200" cy="457200"/>
-          </a:xfrm>
-          <a:prstGeom prst="rect">
-            <a:avLst/>
-          </a:prstGeom>
-          <a:noFill/>
-          <a:ln/>
-        </p:spPr>
-        <p:txBody>
-          <a:bodyPr wrap="square" lIns="0" tIns="0" rIns="0" bIns="0" rtlCol="0" anchor="ctr"/>
-          <a:lstStyle/>
-          <a:p>
-            <a:pPr algn="ctr" indent="0" marL="0">
-              <a:buNone/>
-            </a:pPr>
-            <a:r>
-              <a:rPr lang="en-US" sz="1600" b="1" dirty="0">
-                <a:solidFill>
-                  <a:srgbClr val="FFFFFF"/>
-                </a:solidFill>
-                <a:latin typeface="Calibri" pitchFamily="34" charset="0"/>
-                <a:ea typeface="Calibri" pitchFamily="34" charset="-122"/>
-                <a:cs typeface="Calibri" pitchFamily="34" charset="-120"/>
-              </a:rPr>
-              <a:t>2</a:t>
-            </a:r>
-            <a:endParaRPr lang="en-US" sz="1600" dirty="0"/>
-          </a:p>
-        </p:txBody>
-      </p:sp>
-      <p:sp>
-        <p:nvSpPr>
-          <p:cNvPr id="11" name="Text 9"/>
-          <p:cNvSpPr txBox="1"/>
-          <p:nvPr/>
-        </p:nvSpPr>
-        <p:spPr>
-          <a:xfrm>
-            <a:off x="5394960" y="1097280"/>
-            <a:ext cx="3108960" cy="1005840"/>
-          </a:xfrm>
-          <a:prstGeom prst="rect">
-            <a:avLst/>
-          </a:prstGeom>
-          <a:noFill/>
-          <a:ln/>
-        </p:spPr>
-        <p:txBody>
-          <a:bodyPr wrap="square" lIns="0" tIns="0" rIns="0" bIns="0" rtlCol="0" anchor="ctr"/>
-          <a:lstStyle/>
-          <a:p>
-            <a:pPr indent="0" marL="0">
-              <a:buNone/>
-            </a:pPr>
-            <a:r>
-              <a:rPr lang="en-US" sz="1400" b="1" dirty="0">
-                <a:solidFill>
-                  <a:srgbClr val="1B2A41"/>
-                </a:solidFill>
-                <a:latin typeface="Calibri" pitchFamily="34" charset="0"/>
-                <a:ea typeface="Calibri" pitchFamily="34" charset="-122"/>
-                <a:cs typeface="Calibri" pitchFamily="34" charset="-120"/>
-              </a:rPr>
-              <a:t>Assemble</a:t>
-            </a:r>
-            <a:endParaRPr lang="en-US" sz="1400" dirty="0"/>
-          </a:p>
-          <a:p>
-            <a:pPr indent="0" marL="0">
-              <a:buNone/>
-            </a:pPr>
-            <a:r>
-              <a:rPr lang="en-US" sz="1100" dirty="0">
+              <a:t>children, bmi, smoker and charges show the strongest links to claim.</a:t>
+            </a:r>
+            <a:endParaRPr lang="en-US" sz="1300" dirty="0"/>
+          </a:p>
+          <a:p>
+            <a:pPr marL="342900" indent="-342900">
+              <a:spcAft>
+                <a:spcPts val="800"/>
+              </a:spcAft>
+              <a:buSzPct val="100000"/>
+              <a:buChar char="•"/>
+            </a:pPr>
+            <a:r>
+              <a:rPr lang="en-US" sz="1300" dirty="0">
                 <a:solidFill>
                   <a:srgbClr val="2B3440"/>
                 </a:solidFill>
@@ -4177,144 +4661,20 @@
                 <a:ea typeface="Calibri" pitchFamily="34" charset="-122"/>
                 <a:cs typeface="Calibri" pitchFamily="34" charset="-120"/>
               </a:rPr>
-              <a:t>VectorAssembler on 7 features: age, sex, bmi, children, smoker, region, charges</a:t>
-            </a:r>
-            <a:endParaRPr lang="en-US" sz="1400" dirty="0"/>
-          </a:p>
-        </p:txBody>
-      </p:sp>
-      <p:sp>
-        <p:nvSpPr>
-          <p:cNvPr id="12" name="Shape 10"/>
-          <p:cNvSpPr/>
-          <p:nvPr/>
-        </p:nvSpPr>
-        <p:spPr>
-          <a:xfrm>
-            <a:off x="548640" y="2240280"/>
-            <a:ext cx="3931920" cy="1005840"/>
-          </a:xfrm>
-          <a:prstGeom prst="rect">
-            <a:avLst/>
-          </a:prstGeom>
-          <a:solidFill>
-            <a:srgbClr val="F4F7FA"/>
-          </a:solidFill>
-          <a:ln w="12700">
-            <a:solidFill>
-              <a:srgbClr val="F4F7FA"/>
-            </a:solidFill>
-            <a:prstDash val="solid"/>
-          </a:ln>
-        </p:spPr>
-      </p:sp>
-      <p:sp>
-        <p:nvSpPr>
-          <p:cNvPr id="13" name="Shape 11"/>
-          <p:cNvSpPr/>
-          <p:nvPr/>
-        </p:nvSpPr>
-        <p:spPr>
-          <a:xfrm>
-            <a:off x="685800" y="2514600"/>
-            <a:ext cx="457200" cy="457200"/>
-          </a:xfrm>
-          <a:prstGeom prst="ellipse">
-            <a:avLst/>
-          </a:prstGeom>
-          <a:solidFill>
-            <a:srgbClr val="0F8B8D"/>
-          </a:solidFill>
-          <a:ln w="12700">
-            <a:solidFill>
-              <a:srgbClr val="0F8B8D"/>
-            </a:solidFill>
-            <a:prstDash val="solid"/>
-          </a:ln>
-        </p:spPr>
-      </p:sp>
-      <p:sp>
-        <p:nvSpPr>
-          <p:cNvPr id="14" name="Text 12"/>
-          <p:cNvSpPr txBox="1"/>
-          <p:nvPr/>
-        </p:nvSpPr>
-        <p:spPr>
-          <a:xfrm>
-            <a:off x="685800" y="2514600"/>
-            <a:ext cx="457200" cy="457200"/>
-          </a:xfrm>
-          <a:prstGeom prst="rect">
-            <a:avLst/>
-          </a:prstGeom>
-          <a:noFill/>
-          <a:ln/>
-        </p:spPr>
-        <p:txBody>
-          <a:bodyPr wrap="square" lIns="0" tIns="0" rIns="0" bIns="0" rtlCol="0" anchor="ctr"/>
-          <a:lstStyle/>
-          <a:p>
-            <a:pPr algn="ctr" indent="0" marL="0">
-              <a:buNone/>
-            </a:pPr>
-            <a:r>
-              <a:rPr lang="en-US" sz="1600" b="1" dirty="0">
-                <a:solidFill>
-                  <a:srgbClr val="FFFFFF"/>
-                </a:solidFill>
-                <a:latin typeface="Calibri" pitchFamily="34" charset="0"/>
-                <a:ea typeface="Calibri" pitchFamily="34" charset="-122"/>
-                <a:cs typeface="Calibri" pitchFamily="34" charset="-120"/>
-              </a:rPr>
-              <a:t>3</a:t>
-            </a:r>
-            <a:endParaRPr lang="en-US" sz="1600" dirty="0"/>
-          </a:p>
-        </p:txBody>
-      </p:sp>
-      <p:sp>
-        <p:nvSpPr>
-          <p:cNvPr id="15" name="Text 13"/>
-          <p:cNvSpPr txBox="1"/>
-          <p:nvPr/>
-        </p:nvSpPr>
-        <p:spPr>
-          <a:xfrm>
-            <a:off x="1280160" y="2240280"/>
-            <a:ext cx="3108960" cy="1005840"/>
-          </a:xfrm>
-          <a:prstGeom prst="rect">
-            <a:avLst/>
-          </a:prstGeom>
-          <a:noFill/>
-          <a:ln/>
-        </p:spPr>
-        <p:txBody>
-          <a:bodyPr wrap="square" lIns="0" tIns="0" rIns="0" bIns="0" rtlCol="0" anchor="ctr"/>
-          <a:lstStyle/>
-          <a:p>
-            <a:pPr indent="0" marL="0">
-              <a:buNone/>
-            </a:pPr>
-            <a:r>
-              <a:rPr lang="en-US" sz="1400" b="1" dirty="0">
-                <a:solidFill>
-                  <a:srgbClr val="1B2A41"/>
-                </a:solidFill>
-                <a:latin typeface="Calibri" pitchFamily="34" charset="0"/>
-                <a:ea typeface="Calibri" pitchFamily="34" charset="-122"/>
-                <a:cs typeface="Calibri" pitchFamily="34" charset="-120"/>
-              </a:rPr>
-              <a:t>Split</a:t>
-            </a:r>
-            <a:endParaRPr lang="en-US" sz="1400" dirty="0"/>
-          </a:p>
-          <a:p>
-            <a:pPr indent="0" marL="0">
-              <a:buNone/>
-            </a:pPr>
-            <a:r>
-              <a:rPr lang="en-US" sz="1100" dirty="0">
+              <a:t>More dependents goes with fewer claims (-0.41).</a:t>
+            </a:r>
+            <a:endParaRPr lang="en-US" sz="1300" dirty="0"/>
+          </a:p>
+          <a:p>
+            <a:pPr marL="342900" indent="-342900">
+              <a:spcAft>
+                <a:spcPts val="800"/>
+              </a:spcAft>
+              <a:buSzPct val="100000"/>
+              <a:buChar char="•"/>
+            </a:pPr>
+            <a:r>
+              <a:rPr lang="en-US" sz="1300" dirty="0">
                 <a:solidFill>
                   <a:srgbClr val="2B3440"/>
                 </a:solidFill>
@@ -4322,144 +4682,20 @@
                 <a:ea typeface="Calibri" pitchFamily="34" charset="-122"/>
                 <a:cs typeface="Calibri" pitchFamily="34" charset="-120"/>
               </a:rPr>
-              <a:t>80/20 train-test split, seed 42</a:t>
-            </a:r>
-            <a:endParaRPr lang="en-US" sz="1400" dirty="0"/>
-          </a:p>
-        </p:txBody>
-      </p:sp>
-      <p:sp>
-        <p:nvSpPr>
-          <p:cNvPr id="16" name="Shape 14"/>
-          <p:cNvSpPr/>
-          <p:nvPr/>
-        </p:nvSpPr>
-        <p:spPr>
-          <a:xfrm>
-            <a:off x="4663440" y="2240280"/>
-            <a:ext cx="3931920" cy="1005840"/>
-          </a:xfrm>
-          <a:prstGeom prst="rect">
-            <a:avLst/>
-          </a:prstGeom>
-          <a:solidFill>
-            <a:srgbClr val="F4F7FA"/>
-          </a:solidFill>
-          <a:ln w="12700">
-            <a:solidFill>
-              <a:srgbClr val="F4F7FA"/>
-            </a:solidFill>
-            <a:prstDash val="solid"/>
-          </a:ln>
-        </p:spPr>
-      </p:sp>
-      <p:sp>
-        <p:nvSpPr>
-          <p:cNvPr id="17" name="Shape 15"/>
-          <p:cNvSpPr/>
-          <p:nvPr/>
-        </p:nvSpPr>
-        <p:spPr>
-          <a:xfrm>
-            <a:off x="4800600" y="2514600"/>
-            <a:ext cx="457200" cy="457200"/>
-          </a:xfrm>
-          <a:prstGeom prst="ellipse">
-            <a:avLst/>
-          </a:prstGeom>
-          <a:solidFill>
-            <a:srgbClr val="0F8B8D"/>
-          </a:solidFill>
-          <a:ln w="12700">
-            <a:solidFill>
-              <a:srgbClr val="0F8B8D"/>
-            </a:solidFill>
-            <a:prstDash val="solid"/>
-          </a:ln>
-        </p:spPr>
-      </p:sp>
-      <p:sp>
-        <p:nvSpPr>
-          <p:cNvPr id="18" name="Text 16"/>
-          <p:cNvSpPr txBox="1"/>
-          <p:nvPr/>
-        </p:nvSpPr>
-        <p:spPr>
-          <a:xfrm>
-            <a:off x="4800600" y="2514600"/>
-            <a:ext cx="457200" cy="457200"/>
-          </a:xfrm>
-          <a:prstGeom prst="rect">
-            <a:avLst/>
-          </a:prstGeom>
-          <a:noFill/>
-          <a:ln/>
-        </p:spPr>
-        <p:txBody>
-          <a:bodyPr wrap="square" lIns="0" tIns="0" rIns="0" bIns="0" rtlCol="0" anchor="ctr"/>
-          <a:lstStyle/>
-          <a:p>
-            <a:pPr algn="ctr" indent="0" marL="0">
-              <a:buNone/>
-            </a:pPr>
-            <a:r>
-              <a:rPr lang="en-US" sz="1600" b="1" dirty="0">
-                <a:solidFill>
-                  <a:srgbClr val="FFFFFF"/>
-                </a:solidFill>
-                <a:latin typeface="Calibri" pitchFamily="34" charset="0"/>
-                <a:ea typeface="Calibri" pitchFamily="34" charset="-122"/>
-                <a:cs typeface="Calibri" pitchFamily="34" charset="-120"/>
-              </a:rPr>
-              <a:t>4</a:t>
-            </a:r>
-            <a:endParaRPr lang="en-US" sz="1600" dirty="0"/>
-          </a:p>
-        </p:txBody>
-      </p:sp>
-      <p:sp>
-        <p:nvSpPr>
-          <p:cNvPr id="19" name="Text 17"/>
-          <p:cNvSpPr txBox="1"/>
-          <p:nvPr/>
-        </p:nvSpPr>
-        <p:spPr>
-          <a:xfrm>
-            <a:off x="5394960" y="2240280"/>
-            <a:ext cx="3108960" cy="1005840"/>
-          </a:xfrm>
-          <a:prstGeom prst="rect">
-            <a:avLst/>
-          </a:prstGeom>
-          <a:noFill/>
-          <a:ln/>
-        </p:spPr>
-        <p:txBody>
-          <a:bodyPr wrap="square" lIns="0" tIns="0" rIns="0" bIns="0" rtlCol="0" anchor="ctr"/>
-          <a:lstStyle/>
-          <a:p>
-            <a:pPr indent="0" marL="0">
-              <a:buNone/>
-            </a:pPr>
-            <a:r>
-              <a:rPr lang="en-US" sz="1400" b="1" dirty="0">
-                <a:solidFill>
-                  <a:srgbClr val="1B2A41"/>
-                </a:solidFill>
-                <a:latin typeface="Calibri" pitchFamily="34" charset="0"/>
-                <a:ea typeface="Calibri" pitchFamily="34" charset="-122"/>
-                <a:cs typeface="Calibri" pitchFamily="34" charset="-120"/>
-              </a:rPr>
-              <a:t>Train</a:t>
-            </a:r>
-            <a:endParaRPr lang="en-US" sz="1400" dirty="0"/>
-          </a:p>
-          <a:p>
-            <a:pPr indent="0" marL="0">
-              <a:buNone/>
-            </a:pPr>
-            <a:r>
-              <a:rPr lang="en-US" sz="1100" dirty="0">
+              <a:t>sex and region are close to zero, so they add little signal on their own.</a:t>
+            </a:r>
+            <a:endParaRPr lang="en-US" sz="1300" dirty="0"/>
+          </a:p>
+          <a:p>
+            <a:pPr marL="342900" indent="-342900">
+              <a:spcAft>
+                <a:spcPts val="800"/>
+              </a:spcAft>
+              <a:buSzPct val="100000"/>
+              <a:buChar char="•"/>
+            </a:pPr>
+            <a:r>
+              <a:rPr lang="en-US" sz="1300" dirty="0">
                 <a:solidFill>
                   <a:srgbClr val="2B3440"/>
                 </a:solidFill>
@@ -4467,299 +4703,9 @@
                 <a:ea typeface="Calibri" pitchFamily="34" charset="-122"/>
                 <a:cs typeface="Calibri" pitchFamily="34" charset="-120"/>
               </a:rPr>
-              <a:t>Logistic Regression, maxIter = 10</a:t>
-            </a:r>
-            <a:endParaRPr lang="en-US" sz="1400" dirty="0"/>
-          </a:p>
-        </p:txBody>
-      </p:sp>
-      <p:sp>
-        <p:nvSpPr>
-          <p:cNvPr id="20" name="Shape 18"/>
-          <p:cNvSpPr/>
-          <p:nvPr/>
-        </p:nvSpPr>
-        <p:spPr>
-          <a:xfrm>
-            <a:off x="548640" y="3383280"/>
-            <a:ext cx="3931920" cy="1005840"/>
-          </a:xfrm>
-          <a:prstGeom prst="rect">
-            <a:avLst/>
-          </a:prstGeom>
-          <a:solidFill>
-            <a:srgbClr val="F4F7FA"/>
-          </a:solidFill>
-          <a:ln w="12700">
-            <a:solidFill>
-              <a:srgbClr val="F4F7FA"/>
-            </a:solidFill>
-            <a:prstDash val="solid"/>
-          </a:ln>
-        </p:spPr>
-      </p:sp>
-      <p:sp>
-        <p:nvSpPr>
-          <p:cNvPr id="21" name="Shape 19"/>
-          <p:cNvSpPr/>
-          <p:nvPr/>
-        </p:nvSpPr>
-        <p:spPr>
-          <a:xfrm>
-            <a:off x="685800" y="3657600"/>
-            <a:ext cx="457200" cy="457200"/>
-          </a:xfrm>
-          <a:prstGeom prst="ellipse">
-            <a:avLst/>
-          </a:prstGeom>
-          <a:solidFill>
-            <a:srgbClr val="0F8B8D"/>
-          </a:solidFill>
-          <a:ln w="12700">
-            <a:solidFill>
-              <a:srgbClr val="0F8B8D"/>
-            </a:solidFill>
-            <a:prstDash val="solid"/>
-          </a:ln>
-        </p:spPr>
-      </p:sp>
-      <p:sp>
-        <p:nvSpPr>
-          <p:cNvPr id="22" name="Text 20"/>
-          <p:cNvSpPr txBox="1"/>
-          <p:nvPr/>
-        </p:nvSpPr>
-        <p:spPr>
-          <a:xfrm>
-            <a:off x="685800" y="3657600"/>
-            <a:ext cx="457200" cy="457200"/>
-          </a:xfrm>
-          <a:prstGeom prst="rect">
-            <a:avLst/>
-          </a:prstGeom>
-          <a:noFill/>
-          <a:ln/>
-        </p:spPr>
-        <p:txBody>
-          <a:bodyPr wrap="square" lIns="0" tIns="0" rIns="0" bIns="0" rtlCol="0" anchor="ctr"/>
-          <a:lstStyle/>
-          <a:p>
-            <a:pPr algn="ctr" indent="0" marL="0">
-              <a:buNone/>
-            </a:pPr>
-            <a:r>
-              <a:rPr lang="en-US" sz="1600" b="1" dirty="0">
-                <a:solidFill>
-                  <a:srgbClr val="FFFFFF"/>
-                </a:solidFill>
-                <a:latin typeface="Calibri" pitchFamily="34" charset="0"/>
-                <a:ea typeface="Calibri" pitchFamily="34" charset="-122"/>
-                <a:cs typeface="Calibri" pitchFamily="34" charset="-120"/>
-              </a:rPr>
-              <a:t>5</a:t>
-            </a:r>
-            <a:endParaRPr lang="en-US" sz="1600" dirty="0"/>
-          </a:p>
-        </p:txBody>
-      </p:sp>
-      <p:sp>
-        <p:nvSpPr>
-          <p:cNvPr id="23" name="Text 21"/>
-          <p:cNvSpPr txBox="1"/>
-          <p:nvPr/>
-        </p:nvSpPr>
-        <p:spPr>
-          <a:xfrm>
-            <a:off x="1280160" y="3383280"/>
-            <a:ext cx="3108960" cy="1005840"/>
-          </a:xfrm>
-          <a:prstGeom prst="rect">
-            <a:avLst/>
-          </a:prstGeom>
-          <a:noFill/>
-          <a:ln/>
-        </p:spPr>
-        <p:txBody>
-          <a:bodyPr wrap="square" lIns="0" tIns="0" rIns="0" bIns="0" rtlCol="0" anchor="ctr"/>
-          <a:lstStyle/>
-          <a:p>
-            <a:pPr indent="0" marL="0">
-              <a:buNone/>
-            </a:pPr>
-            <a:r>
-              <a:rPr lang="en-US" sz="1400" b="1" dirty="0">
-                <a:solidFill>
-                  <a:srgbClr val="1B2A41"/>
-                </a:solidFill>
-                <a:latin typeface="Calibri" pitchFamily="34" charset="0"/>
-                <a:ea typeface="Calibri" pitchFamily="34" charset="-122"/>
-                <a:cs typeface="Calibri" pitchFamily="34" charset="-120"/>
-              </a:rPr>
-              <a:t>Evaluate</a:t>
-            </a:r>
-            <a:endParaRPr lang="en-US" sz="1400" dirty="0"/>
-          </a:p>
-          <a:p>
-            <a:pPr indent="0" marL="0">
-              <a:buNone/>
-            </a:pPr>
-            <a:r>
-              <a:rPr lang="en-US" sz="1100" dirty="0">
-                <a:solidFill>
-                  <a:srgbClr val="2B3440"/>
-                </a:solidFill>
-                <a:latin typeface="Calibri" pitchFamily="34" charset="0"/>
-                <a:ea typeface="Calibri" pitchFamily="34" charset="-122"/>
-                <a:cs typeface="Calibri" pitchFamily="34" charset="-120"/>
-              </a:rPr>
-              <a:t>Test AUC (areaUnderROC); feature coefficients shown via pandas</a:t>
-            </a:r>
-            <a:endParaRPr lang="en-US" sz="1400" dirty="0"/>
-          </a:p>
-        </p:txBody>
-      </p:sp>
-      <p:sp>
-        <p:nvSpPr>
-          <p:cNvPr id="24" name="Shape 22"/>
-          <p:cNvSpPr/>
-          <p:nvPr/>
-        </p:nvSpPr>
-        <p:spPr>
-          <a:xfrm>
-            <a:off x="4663440" y="3383280"/>
-            <a:ext cx="3931920" cy="1005840"/>
-          </a:xfrm>
-          <a:prstGeom prst="rect">
-            <a:avLst/>
-          </a:prstGeom>
-          <a:solidFill>
-            <a:srgbClr val="F4F7FA"/>
-          </a:solidFill>
-          <a:ln w="12700">
-            <a:solidFill>
-              <a:srgbClr val="F4F7FA"/>
-            </a:solidFill>
-            <a:prstDash val="solid"/>
-          </a:ln>
-        </p:spPr>
-      </p:sp>
-      <p:sp>
-        <p:nvSpPr>
-          <p:cNvPr id="25" name="Shape 23"/>
-          <p:cNvSpPr/>
-          <p:nvPr/>
-        </p:nvSpPr>
-        <p:spPr>
-          <a:xfrm>
-            <a:off x="4800600" y="3657600"/>
-            <a:ext cx="457200" cy="457200"/>
-          </a:xfrm>
-          <a:prstGeom prst="ellipse">
-            <a:avLst/>
-          </a:prstGeom>
-          <a:solidFill>
-            <a:srgbClr val="0F8B8D"/>
-          </a:solidFill>
-          <a:ln w="12700">
-            <a:solidFill>
-              <a:srgbClr val="0F8B8D"/>
-            </a:solidFill>
-            <a:prstDash val="solid"/>
-          </a:ln>
-        </p:spPr>
-      </p:sp>
-      <p:sp>
-        <p:nvSpPr>
-          <p:cNvPr id="26" name="Text 24"/>
-          <p:cNvSpPr txBox="1"/>
-          <p:nvPr/>
-        </p:nvSpPr>
-        <p:spPr>
-          <a:xfrm>
-            <a:off x="4800600" y="3657600"/>
-            <a:ext cx="457200" cy="457200"/>
-          </a:xfrm>
-          <a:prstGeom prst="rect">
-            <a:avLst/>
-          </a:prstGeom>
-          <a:noFill/>
-          <a:ln/>
-        </p:spPr>
-        <p:txBody>
-          <a:bodyPr wrap="square" lIns="0" tIns="0" rIns="0" bIns="0" rtlCol="0" anchor="ctr"/>
-          <a:lstStyle/>
-          <a:p>
-            <a:pPr algn="ctr" indent="0" marL="0">
-              <a:buNone/>
-            </a:pPr>
-            <a:r>
-              <a:rPr lang="en-US" sz="1600" b="1" dirty="0">
-                <a:solidFill>
-                  <a:srgbClr val="FFFFFF"/>
-                </a:solidFill>
-                <a:latin typeface="Calibri" pitchFamily="34" charset="0"/>
-                <a:ea typeface="Calibri" pitchFamily="34" charset="-122"/>
-                <a:cs typeface="Calibri" pitchFamily="34" charset="-120"/>
-              </a:rPr>
-              <a:t>6</a:t>
-            </a:r>
-            <a:endParaRPr lang="en-US" sz="1600" dirty="0"/>
-          </a:p>
-        </p:txBody>
-      </p:sp>
-      <p:sp>
-        <p:nvSpPr>
-          <p:cNvPr id="27" name="Text 25"/>
-          <p:cNvSpPr txBox="1"/>
-          <p:nvPr/>
-        </p:nvSpPr>
-        <p:spPr>
-          <a:xfrm>
-            <a:off x="5394960" y="3383280"/>
-            <a:ext cx="3108960" cy="1005840"/>
-          </a:xfrm>
-          <a:prstGeom prst="rect">
-            <a:avLst/>
-          </a:prstGeom>
-          <a:noFill/>
-          <a:ln/>
-        </p:spPr>
-        <p:txBody>
-          <a:bodyPr wrap="square" lIns="0" tIns="0" rIns="0" bIns="0" rtlCol="0" anchor="ctr"/>
-          <a:lstStyle/>
-          <a:p>
-            <a:pPr indent="0" marL="0">
-              <a:buNone/>
-            </a:pPr>
-            <a:r>
-              <a:rPr lang="en-US" sz="1400" b="1" dirty="0">
-                <a:solidFill>
-                  <a:srgbClr val="1B2A41"/>
-                </a:solidFill>
-                <a:latin typeface="Calibri" pitchFamily="34" charset="0"/>
-                <a:ea typeface="Calibri" pitchFamily="34" charset="-122"/>
-                <a:cs typeface="Calibri" pitchFamily="34" charset="-120"/>
-              </a:rPr>
-              <a:t>Save</a:t>
-            </a:r>
-            <a:endParaRPr lang="en-US" sz="1400" dirty="0"/>
-          </a:p>
-          <a:p>
-            <a:pPr indent="0" marL="0">
-              <a:buNone/>
-            </a:pPr>
-            <a:r>
-              <a:rPr lang="en-US" sz="1100" dirty="0">
-                <a:solidFill>
-                  <a:srgbClr val="2B3440"/>
-                </a:solidFill>
-                <a:latin typeface="Calibri" pitchFamily="34" charset="0"/>
-                <a:ea typeface="Calibri" pitchFamily="34" charset="-122"/>
-                <a:cs typeface="Calibri" pitchFamily="34" charset="-120"/>
-              </a:rPr>
-              <a:t>Write claim, probability, prediction to Parquet in /insurance/results</a:t>
-            </a:r>
-            <a:endParaRPr lang="en-US" sz="1400" dirty="0"/>
+              <a:t>These are simple linear correlations, a first look before the model coefficients.</a:t>
+            </a:r>
+            <a:endParaRPr lang="en-US" sz="1300" dirty="0"/>
           </a:p>
         </p:txBody>
       </p:sp>
@@ -4853,7 +4799,7 @@
                 <a:ea typeface="Calibri" pitchFamily="34" charset="-122"/>
                 <a:cs typeface="Calibri" pitchFamily="34" charset="-120"/>
               </a:rPr>
-              <a:t>Key takeaways and next steps</a:t>
+              <a:t>PySpark ML pipeline</a:t>
             </a:r>
             <a:endParaRPr lang="en-US" sz="2800" dirty="0"/>
           </a:p>
@@ -4861,14 +4807,64 @@
       </p:sp>
       <p:sp>
         <p:nvSpPr>
-          <p:cNvPr id="4" name="Text 2"/>
+          <p:cNvPr id="4" name="Shape 2"/>
+          <p:cNvSpPr/>
+          <p:nvPr/>
+        </p:nvSpPr>
+        <p:spPr>
+          <a:xfrm>
+            <a:off x="548640" y="1097280"/>
+            <a:ext cx="3931920" cy="1005840"/>
+          </a:xfrm>
+          <a:prstGeom prst="rect">
+            <a:avLst/>
+          </a:prstGeom>
+          <a:solidFill>
+            <a:srgbClr val="F4F7FA"/>
+          </a:solidFill>
+          <a:ln w="12700">
+            <a:solidFill>
+              <a:srgbClr val="F4F7FA"/>
+            </a:solidFill>
+            <a:prstDash val="solid"/>
+          </a:ln>
+        </p:spPr>
+      </p:sp>
+      <p:sp>
+        <p:nvSpPr>
+          <p:cNvPr id="5" name="Shape 3"/>
+          <p:cNvSpPr/>
+          <p:nvPr/>
+        </p:nvSpPr>
+        <p:spPr>
+          <a:xfrm>
+            <a:off x="685800" y="1371600"/>
+            <a:ext cx="457200" cy="457200"/>
+          </a:xfrm>
+          <a:prstGeom prst="ellipse">
+            <a:avLst/>
+          </a:prstGeom>
+          <a:solidFill>
+            <a:srgbClr val="0F8B8D"/>
+          </a:solidFill>
+          <a:ln w="12700">
+            <a:solidFill>
+              <a:srgbClr val="0F8B8D"/>
+            </a:solidFill>
+            <a:prstDash val="solid"/>
+          </a:ln>
+        </p:spPr>
+      </p:sp>
+      <p:sp>
+        <p:nvSpPr>
+          <p:cNvPr id="6" name="Text 4"/>
           <p:cNvSpPr txBox="1"/>
           <p:nvPr/>
         </p:nvSpPr>
         <p:spPr>
           <a:xfrm>
-            <a:off x="548640" y="1097280"/>
-            <a:ext cx="8046720" cy="3474720"/>
+            <a:off x="685800" y="1371600"/>
+            <a:ext cx="457200" cy="457200"/>
           </a:xfrm>
           <a:prstGeom prst="rect">
             <a:avLst/>
@@ -4877,18 +4873,70 @@
           <a:ln/>
         </p:spPr>
         <p:txBody>
-          <a:bodyPr wrap="square" rtlCol="0" anchor="t"/>
-          <a:lstStyle/>
-          <a:p>
-            <a:pPr marL="342900" indent="-342900">
-              <a:spcAft>
-                <a:spcPts val="800"/>
-              </a:spcAft>
-              <a:buSzPct val="100000"/>
-              <a:buChar char="•"/>
-            </a:pPr>
-            <a:r>
-              <a:rPr lang="en-US" sz="1700" dirty="0">
+          <a:bodyPr wrap="square" lIns="0" tIns="0" rIns="0" bIns="0" rtlCol="0" anchor="ctr"/>
+          <a:lstStyle/>
+          <a:p>
+            <a:pPr algn="ctr" indent="0" marL="0">
+              <a:buNone/>
+            </a:pPr>
+            <a:r>
+              <a:rPr lang="en-US" sz="1600" b="1" dirty="0">
+                <a:solidFill>
+                  <a:srgbClr val="FFFFFF"/>
+                </a:solidFill>
+                <a:latin typeface="Calibri" pitchFamily="34" charset="0"/>
+                <a:ea typeface="Calibri" pitchFamily="34" charset="-122"/>
+                <a:cs typeface="Calibri" pitchFamily="34" charset="-120"/>
+              </a:rPr>
+              <a:t>1</a:t>
+            </a:r>
+            <a:endParaRPr lang="en-US" sz="1600" dirty="0"/>
+          </a:p>
+        </p:txBody>
+      </p:sp>
+      <p:sp>
+        <p:nvSpPr>
+          <p:cNvPr id="7" name="Text 5"/>
+          <p:cNvSpPr txBox="1"/>
+          <p:nvPr/>
+        </p:nvSpPr>
+        <p:spPr>
+          <a:xfrm>
+            <a:off x="1280160" y="1097280"/>
+            <a:ext cx="3108960" cy="1005840"/>
+          </a:xfrm>
+          <a:prstGeom prst="rect">
+            <a:avLst/>
+          </a:prstGeom>
+          <a:noFill/>
+          <a:ln/>
+        </p:spPr>
+        <p:txBody>
+          <a:bodyPr wrap="square" lIns="0" tIns="0" rIns="0" bIns="0" rtlCol="0" anchor="ctr"/>
+          <a:lstStyle/>
+          <a:p>
+            <a:pPr indent="0" marL="0">
+              <a:buNone/>
+            </a:pPr>
+            <a:r>
+              <a:rPr lang="en-US" sz="1400" b="1" dirty="0">
+                <a:solidFill>
+                  <a:srgbClr val="1B2A41"/>
+                </a:solidFill>
+                <a:latin typeface="Calibri" pitchFamily="34" charset="0"/>
+                <a:ea typeface="Calibri" pitchFamily="34" charset="-122"/>
+                <a:cs typeface="Calibri" pitchFamily="34" charset="-120"/>
+              </a:rPr>
+              <a:t>Load</a:t>
+            </a:r>
+            <a:endParaRPr lang="en-US" sz="1400" dirty="0"/>
+          </a:p>
+          <a:p>
+            <a:pPr indent="0" marL="0">
+              <a:buNone/>
+            </a:pPr>
+            <a:r>
+              <a:rPr lang="en-US" sz="1100" dirty="0">
                 <a:solidFill>
                   <a:srgbClr val="2B3440"/>
                 </a:solidFill>
@@ -4896,20 +4944,144 @@
                 <a:ea typeface="Calibri" pitchFamily="34" charset="-122"/>
                 <a:cs typeface="Calibri" pitchFamily="34" charset="-120"/>
               </a:rPr>
-              <a:t>End-to-end distributed pipeline: CSV to HDFS to Hive to PySpark to Parquet results.</a:t>
-            </a:r>
-            <a:endParaRPr lang="en-US" sz="1700" dirty="0"/>
-          </a:p>
-          <a:p>
-            <a:pPr marL="342900" indent="-342900">
-              <a:spcAft>
-                <a:spcPts val="800"/>
-              </a:spcAft>
-              <a:buSzPct val="100000"/>
-              <a:buChar char="•"/>
-            </a:pPr>
-            <a:r>
-              <a:rPr lang="en-US" sz="1700" dirty="0">
+              <a:t>Read Insurance.csv from hdfs://namenode:9000 with header and inferred schema</a:t>
+            </a:r>
+            <a:endParaRPr lang="en-US" sz="1400" dirty="0"/>
+          </a:p>
+        </p:txBody>
+      </p:sp>
+      <p:sp>
+        <p:nvSpPr>
+          <p:cNvPr id="8" name="Shape 6"/>
+          <p:cNvSpPr/>
+          <p:nvPr/>
+        </p:nvSpPr>
+        <p:spPr>
+          <a:xfrm>
+            <a:off x="4663440" y="1097280"/>
+            <a:ext cx="3931920" cy="1005840"/>
+          </a:xfrm>
+          <a:prstGeom prst="rect">
+            <a:avLst/>
+          </a:prstGeom>
+          <a:solidFill>
+            <a:srgbClr val="F4F7FA"/>
+          </a:solidFill>
+          <a:ln w="12700">
+            <a:solidFill>
+              <a:srgbClr val="F4F7FA"/>
+            </a:solidFill>
+            <a:prstDash val="solid"/>
+          </a:ln>
+        </p:spPr>
+      </p:sp>
+      <p:sp>
+        <p:nvSpPr>
+          <p:cNvPr id="9" name="Shape 7"/>
+          <p:cNvSpPr/>
+          <p:nvPr/>
+        </p:nvSpPr>
+        <p:spPr>
+          <a:xfrm>
+            <a:off x="4800600" y="1371600"/>
+            <a:ext cx="457200" cy="457200"/>
+          </a:xfrm>
+          <a:prstGeom prst="ellipse">
+            <a:avLst/>
+          </a:prstGeom>
+          <a:solidFill>
+            <a:srgbClr val="0F8B8D"/>
+          </a:solidFill>
+          <a:ln w="12700">
+            <a:solidFill>
+              <a:srgbClr val="0F8B8D"/>
+            </a:solidFill>
+            <a:prstDash val="solid"/>
+          </a:ln>
+        </p:spPr>
+      </p:sp>
+      <p:sp>
+        <p:nvSpPr>
+          <p:cNvPr id="10" name="Text 8"/>
+          <p:cNvSpPr txBox="1"/>
+          <p:nvPr/>
+        </p:nvSpPr>
+        <p:spPr>
+          <a:xfrm>
+            <a:off x="4800600" y="1371600"/>
+            <a:ext cx="457200" cy="457200"/>
+          </a:xfrm>
+          <a:prstGeom prst="rect">
+            <a:avLst/>
+          </a:prstGeom>
+          <a:noFill/>
+          <a:ln/>
+        </p:spPr>
+        <p:txBody>
+          <a:bodyPr wrap="square" lIns="0" tIns="0" rIns="0" bIns="0" rtlCol="0" anchor="ctr"/>
+          <a:lstStyle/>
+          <a:p>
+            <a:pPr algn="ctr" indent="0" marL="0">
+              <a:buNone/>
+            </a:pPr>
+            <a:r>
+              <a:rPr lang="en-US" sz="1600" b="1" dirty="0">
+                <a:solidFill>
+                  <a:srgbClr val="FFFFFF"/>
+                </a:solidFill>
+                <a:latin typeface="Calibri" pitchFamily="34" charset="0"/>
+                <a:ea typeface="Calibri" pitchFamily="34" charset="-122"/>
+                <a:cs typeface="Calibri" pitchFamily="34" charset="-120"/>
+              </a:rPr>
+              <a:t>2</a:t>
+            </a:r>
+            <a:endParaRPr lang="en-US" sz="1600" dirty="0"/>
+          </a:p>
+        </p:txBody>
+      </p:sp>
+      <p:sp>
+        <p:nvSpPr>
+          <p:cNvPr id="11" name="Text 9"/>
+          <p:cNvSpPr txBox="1"/>
+          <p:nvPr/>
+        </p:nvSpPr>
+        <p:spPr>
+          <a:xfrm>
+            <a:off x="5394960" y="1097280"/>
+            <a:ext cx="3108960" cy="1005840"/>
+          </a:xfrm>
+          <a:prstGeom prst="rect">
+            <a:avLst/>
+          </a:prstGeom>
+          <a:noFill/>
+          <a:ln/>
+        </p:spPr>
+        <p:txBody>
+          <a:bodyPr wrap="square" lIns="0" tIns="0" rIns="0" bIns="0" rtlCol="0" anchor="ctr"/>
+          <a:lstStyle/>
+          <a:p>
+            <a:pPr indent="0" marL="0">
+              <a:buNone/>
+            </a:pPr>
+            <a:r>
+              <a:rPr lang="en-US" sz="1400" b="1" dirty="0">
+                <a:solidFill>
+                  <a:srgbClr val="1B2A41"/>
+                </a:solidFill>
+                <a:latin typeface="Calibri" pitchFamily="34" charset="0"/>
+                <a:ea typeface="Calibri" pitchFamily="34" charset="-122"/>
+                <a:cs typeface="Calibri" pitchFamily="34" charset="-120"/>
+              </a:rPr>
+              <a:t>Assemble</a:t>
+            </a:r>
+            <a:endParaRPr lang="en-US" sz="1400" dirty="0"/>
+          </a:p>
+          <a:p>
+            <a:pPr indent="0" marL="0">
+              <a:buNone/>
+            </a:pPr>
+            <a:r>
+              <a:rPr lang="en-US" sz="1100" dirty="0">
                 <a:solidFill>
                   <a:srgbClr val="2B3440"/>
                 </a:solidFill>
@@ -4917,20 +5089,144 @@
                 <a:ea typeface="Calibri" pitchFamily="34" charset="-122"/>
                 <a:cs typeface="Calibri" pitchFamily="34" charset="-120"/>
               </a:rPr>
-              <a:t>Smoking status is the clearest risk signal in the data, linked to both claim rate and cost.</a:t>
-            </a:r>
-            <a:endParaRPr lang="en-US" sz="1700" dirty="0"/>
-          </a:p>
-          <a:p>
-            <a:pPr marL="342900" indent="-342900">
-              <a:spcAft>
-                <a:spcPts val="800"/>
-              </a:spcAft>
-              <a:buSzPct val="100000"/>
-              <a:buChar char="•"/>
-            </a:pPr>
-            <a:r>
-              <a:rPr lang="en-US" sz="1700" dirty="0">
+              <a:t>VectorAssembler on 7 features: age, sex, bmi, children, smoker, region, charges</a:t>
+            </a:r>
+            <a:endParaRPr lang="en-US" sz="1400" dirty="0"/>
+          </a:p>
+        </p:txBody>
+      </p:sp>
+      <p:sp>
+        <p:nvSpPr>
+          <p:cNvPr id="12" name="Shape 10"/>
+          <p:cNvSpPr/>
+          <p:nvPr/>
+        </p:nvSpPr>
+        <p:spPr>
+          <a:xfrm>
+            <a:off x="548640" y="2240280"/>
+            <a:ext cx="3931920" cy="1005840"/>
+          </a:xfrm>
+          <a:prstGeom prst="rect">
+            <a:avLst/>
+          </a:prstGeom>
+          <a:solidFill>
+            <a:srgbClr val="F4F7FA"/>
+          </a:solidFill>
+          <a:ln w="12700">
+            <a:solidFill>
+              <a:srgbClr val="F4F7FA"/>
+            </a:solidFill>
+            <a:prstDash val="solid"/>
+          </a:ln>
+        </p:spPr>
+      </p:sp>
+      <p:sp>
+        <p:nvSpPr>
+          <p:cNvPr id="13" name="Shape 11"/>
+          <p:cNvSpPr/>
+          <p:nvPr/>
+        </p:nvSpPr>
+        <p:spPr>
+          <a:xfrm>
+            <a:off x="685800" y="2514600"/>
+            <a:ext cx="457200" cy="457200"/>
+          </a:xfrm>
+          <a:prstGeom prst="ellipse">
+            <a:avLst/>
+          </a:prstGeom>
+          <a:solidFill>
+            <a:srgbClr val="0F8B8D"/>
+          </a:solidFill>
+          <a:ln w="12700">
+            <a:solidFill>
+              <a:srgbClr val="0F8B8D"/>
+            </a:solidFill>
+            <a:prstDash val="solid"/>
+          </a:ln>
+        </p:spPr>
+      </p:sp>
+      <p:sp>
+        <p:nvSpPr>
+          <p:cNvPr id="14" name="Text 12"/>
+          <p:cNvSpPr txBox="1"/>
+          <p:nvPr/>
+        </p:nvSpPr>
+        <p:spPr>
+          <a:xfrm>
+            <a:off x="685800" y="2514600"/>
+            <a:ext cx="457200" cy="457200"/>
+          </a:xfrm>
+          <a:prstGeom prst="rect">
+            <a:avLst/>
+          </a:prstGeom>
+          <a:noFill/>
+          <a:ln/>
+        </p:spPr>
+        <p:txBody>
+          <a:bodyPr wrap="square" lIns="0" tIns="0" rIns="0" bIns="0" rtlCol="0" anchor="ctr"/>
+          <a:lstStyle/>
+          <a:p>
+            <a:pPr algn="ctr" indent="0" marL="0">
+              <a:buNone/>
+            </a:pPr>
+            <a:r>
+              <a:rPr lang="en-US" sz="1600" b="1" dirty="0">
+                <a:solidFill>
+                  <a:srgbClr val="FFFFFF"/>
+                </a:solidFill>
+                <a:latin typeface="Calibri" pitchFamily="34" charset="0"/>
+                <a:ea typeface="Calibri" pitchFamily="34" charset="-122"/>
+                <a:cs typeface="Calibri" pitchFamily="34" charset="-120"/>
+              </a:rPr>
+              <a:t>3</a:t>
+            </a:r>
+            <a:endParaRPr lang="en-US" sz="1600" dirty="0"/>
+          </a:p>
+        </p:txBody>
+      </p:sp>
+      <p:sp>
+        <p:nvSpPr>
+          <p:cNvPr id="15" name="Text 13"/>
+          <p:cNvSpPr txBox="1"/>
+          <p:nvPr/>
+        </p:nvSpPr>
+        <p:spPr>
+          <a:xfrm>
+            <a:off x="1280160" y="2240280"/>
+            <a:ext cx="3108960" cy="1005840"/>
+          </a:xfrm>
+          <a:prstGeom prst="rect">
+            <a:avLst/>
+          </a:prstGeom>
+          <a:noFill/>
+          <a:ln/>
+        </p:spPr>
+        <p:txBody>
+          <a:bodyPr wrap="square" lIns="0" tIns="0" rIns="0" bIns="0" rtlCol="0" anchor="ctr"/>
+          <a:lstStyle/>
+          <a:p>
+            <a:pPr indent="0" marL="0">
+              <a:buNone/>
+            </a:pPr>
+            <a:r>
+              <a:rPr lang="en-US" sz="1400" b="1" dirty="0">
+                <a:solidFill>
+                  <a:srgbClr val="1B2A41"/>
+                </a:solidFill>
+                <a:latin typeface="Calibri" pitchFamily="34" charset="0"/>
+                <a:ea typeface="Calibri" pitchFamily="34" charset="-122"/>
+                <a:cs typeface="Calibri" pitchFamily="34" charset="-120"/>
+              </a:rPr>
+              <a:t>Split</a:t>
+            </a:r>
+            <a:endParaRPr lang="en-US" sz="1400" dirty="0"/>
+          </a:p>
+          <a:p>
+            <a:pPr indent="0" marL="0">
+              <a:buNone/>
+            </a:pPr>
+            <a:r>
+              <a:rPr lang="en-US" sz="1100" dirty="0">
                 <a:solidFill>
                   <a:srgbClr val="2B3440"/>
                 </a:solidFill>
@@ -4938,20 +5234,144 @@
                 <a:ea typeface="Calibri" pitchFamily="34" charset="-122"/>
                 <a:cs typeface="Calibri" pitchFamily="34" charset="-120"/>
               </a:rPr>
-              <a:t>Check for leakage: charges is used as a feature, and may be a consequence of a claim rather than a predictor.</a:t>
-            </a:r>
-            <a:endParaRPr lang="en-US" sz="1700" dirty="0"/>
-          </a:p>
-          <a:p>
-            <a:pPr marL="342900" indent="-342900">
-              <a:spcAft>
-                <a:spcPts val="800"/>
-              </a:spcAft>
-              <a:buSzPct val="100000"/>
-              <a:buChar char="•"/>
-            </a:pPr>
-            <a:r>
-              <a:rPr lang="en-US" sz="1700" dirty="0">
+              <a:t>80/20 train-test split, seed 42</a:t>
+            </a:r>
+            <a:endParaRPr lang="en-US" sz="1400" dirty="0"/>
+          </a:p>
+        </p:txBody>
+      </p:sp>
+      <p:sp>
+        <p:nvSpPr>
+          <p:cNvPr id="16" name="Shape 14"/>
+          <p:cNvSpPr/>
+          <p:nvPr/>
+        </p:nvSpPr>
+        <p:spPr>
+          <a:xfrm>
+            <a:off x="4663440" y="2240280"/>
+            <a:ext cx="3931920" cy="1005840"/>
+          </a:xfrm>
+          <a:prstGeom prst="rect">
+            <a:avLst/>
+          </a:prstGeom>
+          <a:solidFill>
+            <a:srgbClr val="F4F7FA"/>
+          </a:solidFill>
+          <a:ln w="12700">
+            <a:solidFill>
+              <a:srgbClr val="F4F7FA"/>
+            </a:solidFill>
+            <a:prstDash val="solid"/>
+          </a:ln>
+        </p:spPr>
+      </p:sp>
+      <p:sp>
+        <p:nvSpPr>
+          <p:cNvPr id="17" name="Shape 15"/>
+          <p:cNvSpPr/>
+          <p:nvPr/>
+        </p:nvSpPr>
+        <p:spPr>
+          <a:xfrm>
+            <a:off x="4800600" y="2514600"/>
+            <a:ext cx="457200" cy="457200"/>
+          </a:xfrm>
+          <a:prstGeom prst="ellipse">
+            <a:avLst/>
+          </a:prstGeom>
+          <a:solidFill>
+            <a:srgbClr val="0F8B8D"/>
+          </a:solidFill>
+          <a:ln w="12700">
+            <a:solidFill>
+              <a:srgbClr val="0F8B8D"/>
+            </a:solidFill>
+            <a:prstDash val="solid"/>
+          </a:ln>
+        </p:spPr>
+      </p:sp>
+      <p:sp>
+        <p:nvSpPr>
+          <p:cNvPr id="18" name="Text 16"/>
+          <p:cNvSpPr txBox="1"/>
+          <p:nvPr/>
+        </p:nvSpPr>
+        <p:spPr>
+          <a:xfrm>
+            <a:off x="4800600" y="2514600"/>
+            <a:ext cx="457200" cy="457200"/>
+          </a:xfrm>
+          <a:prstGeom prst="rect">
+            <a:avLst/>
+          </a:prstGeom>
+          <a:noFill/>
+          <a:ln/>
+        </p:spPr>
+        <p:txBody>
+          <a:bodyPr wrap="square" lIns="0" tIns="0" rIns="0" bIns="0" rtlCol="0" anchor="ctr"/>
+          <a:lstStyle/>
+          <a:p>
+            <a:pPr algn="ctr" indent="0" marL="0">
+              <a:buNone/>
+            </a:pPr>
+            <a:r>
+              <a:rPr lang="en-US" sz="1600" b="1" dirty="0">
+                <a:solidFill>
+                  <a:srgbClr val="FFFFFF"/>
+                </a:solidFill>
+                <a:latin typeface="Calibri" pitchFamily="34" charset="0"/>
+                <a:ea typeface="Calibri" pitchFamily="34" charset="-122"/>
+                <a:cs typeface="Calibri" pitchFamily="34" charset="-120"/>
+              </a:rPr>
+              <a:t>4</a:t>
+            </a:r>
+            <a:endParaRPr lang="en-US" sz="1600" dirty="0"/>
+          </a:p>
+        </p:txBody>
+      </p:sp>
+      <p:sp>
+        <p:nvSpPr>
+          <p:cNvPr id="19" name="Text 17"/>
+          <p:cNvSpPr txBox="1"/>
+          <p:nvPr/>
+        </p:nvSpPr>
+        <p:spPr>
+          <a:xfrm>
+            <a:off x="5394960" y="2240280"/>
+            <a:ext cx="3108960" cy="1005840"/>
+          </a:xfrm>
+          <a:prstGeom prst="rect">
+            <a:avLst/>
+          </a:prstGeom>
+          <a:noFill/>
+          <a:ln/>
+        </p:spPr>
+        <p:txBody>
+          <a:bodyPr wrap="square" lIns="0" tIns="0" rIns="0" bIns="0" rtlCol="0" anchor="ctr"/>
+          <a:lstStyle/>
+          <a:p>
+            <a:pPr indent="0" marL="0">
+              <a:buNone/>
+            </a:pPr>
+            <a:r>
+              <a:rPr lang="en-US" sz="1400" b="1" dirty="0">
+                <a:solidFill>
+                  <a:srgbClr val="1B2A41"/>
+                </a:solidFill>
+                <a:latin typeface="Calibri" pitchFamily="34" charset="0"/>
+                <a:ea typeface="Calibri" pitchFamily="34" charset="-122"/>
+                <a:cs typeface="Calibri" pitchFamily="34" charset="-120"/>
+              </a:rPr>
+              <a:t>Train</a:t>
+            </a:r>
+            <a:endParaRPr lang="en-US" sz="1400" dirty="0"/>
+          </a:p>
+          <a:p>
+            <a:pPr indent="0" marL="0">
+              <a:buNone/>
+            </a:pPr>
+            <a:r>
+              <a:rPr lang="en-US" sz="1100" dirty="0">
                 <a:solidFill>
                   <a:srgbClr val="2B3440"/>
                 </a:solidFill>
@@ -4959,20 +5379,144 @@
                 <a:ea typeface="Calibri" pitchFamily="34" charset="-122"/>
                 <a:cs typeface="Calibri" pitchFamily="34" charset="-120"/>
               </a:rPr>
-              <a:t>Improve the baseline: scale features, one-hot encode region, try tree-based models and cross-validation.</a:t>
-            </a:r>
-            <a:endParaRPr lang="en-US" sz="1700" dirty="0"/>
-          </a:p>
-          <a:p>
-            <a:pPr marL="342900" indent="-342900">
-              <a:spcAft>
-                <a:spcPts val="800"/>
-              </a:spcAft>
-              <a:buSzPct val="100000"/>
-              <a:buChar char="•"/>
-            </a:pPr>
-            <a:r>
-              <a:rPr lang="en-US" sz="1700" dirty="0">
+              <a:t>Logistic Regression, maxIter = 10</a:t>
+            </a:r>
+            <a:endParaRPr lang="en-US" sz="1400" dirty="0"/>
+          </a:p>
+        </p:txBody>
+      </p:sp>
+      <p:sp>
+        <p:nvSpPr>
+          <p:cNvPr id="20" name="Shape 18"/>
+          <p:cNvSpPr/>
+          <p:nvPr/>
+        </p:nvSpPr>
+        <p:spPr>
+          <a:xfrm>
+            <a:off x="548640" y="3383280"/>
+            <a:ext cx="3931920" cy="1005840"/>
+          </a:xfrm>
+          <a:prstGeom prst="rect">
+            <a:avLst/>
+          </a:prstGeom>
+          <a:solidFill>
+            <a:srgbClr val="F4F7FA"/>
+          </a:solidFill>
+          <a:ln w="12700">
+            <a:solidFill>
+              <a:srgbClr val="F4F7FA"/>
+            </a:solidFill>
+            <a:prstDash val="solid"/>
+          </a:ln>
+        </p:spPr>
+      </p:sp>
+      <p:sp>
+        <p:nvSpPr>
+          <p:cNvPr id="21" name="Shape 19"/>
+          <p:cNvSpPr/>
+          <p:nvPr/>
+        </p:nvSpPr>
+        <p:spPr>
+          <a:xfrm>
+            <a:off x="685800" y="3657600"/>
+            <a:ext cx="457200" cy="457200"/>
+          </a:xfrm>
+          <a:prstGeom prst="ellipse">
+            <a:avLst/>
+          </a:prstGeom>
+          <a:solidFill>
+            <a:srgbClr val="0F8B8D"/>
+          </a:solidFill>
+          <a:ln w="12700">
+            <a:solidFill>
+              <a:srgbClr val="0F8B8D"/>
+            </a:solidFill>
+            <a:prstDash val="solid"/>
+          </a:ln>
+        </p:spPr>
+      </p:sp>
+      <p:sp>
+        <p:nvSpPr>
+          <p:cNvPr id="22" name="Text 20"/>
+          <p:cNvSpPr txBox="1"/>
+          <p:nvPr/>
+        </p:nvSpPr>
+        <p:spPr>
+          <a:xfrm>
+            <a:off x="685800" y="3657600"/>
+            <a:ext cx="457200" cy="457200"/>
+          </a:xfrm>
+          <a:prstGeom prst="rect">
+            <a:avLst/>
+          </a:prstGeom>
+          <a:noFill/>
+          <a:ln/>
+        </p:spPr>
+        <p:txBody>
+          <a:bodyPr wrap="square" lIns="0" tIns="0" rIns="0" bIns="0" rtlCol="0" anchor="ctr"/>
+          <a:lstStyle/>
+          <a:p>
+            <a:pPr algn="ctr" indent="0" marL="0">
+              <a:buNone/>
+            </a:pPr>
+            <a:r>
+              <a:rPr lang="en-US" sz="1600" b="1" dirty="0">
+                <a:solidFill>
+                  <a:srgbClr val="FFFFFF"/>
+                </a:solidFill>
+                <a:latin typeface="Calibri" pitchFamily="34" charset="0"/>
+                <a:ea typeface="Calibri" pitchFamily="34" charset="-122"/>
+                <a:cs typeface="Calibri" pitchFamily="34" charset="-120"/>
+              </a:rPr>
+              <a:t>5</a:t>
+            </a:r>
+            <a:endParaRPr lang="en-US" sz="1600" dirty="0"/>
+          </a:p>
+        </p:txBody>
+      </p:sp>
+      <p:sp>
+        <p:nvSpPr>
+          <p:cNvPr id="23" name="Text 21"/>
+          <p:cNvSpPr txBox="1"/>
+          <p:nvPr/>
+        </p:nvSpPr>
+        <p:spPr>
+          <a:xfrm>
+            <a:off x="1280160" y="3383280"/>
+            <a:ext cx="3108960" cy="1005840"/>
+          </a:xfrm>
+          <a:prstGeom prst="rect">
+            <a:avLst/>
+          </a:prstGeom>
+          <a:noFill/>
+          <a:ln/>
+        </p:spPr>
+        <p:txBody>
+          <a:bodyPr wrap="square" lIns="0" tIns="0" rIns="0" bIns="0" rtlCol="0" anchor="ctr"/>
+          <a:lstStyle/>
+          <a:p>
+            <a:pPr indent="0" marL="0">
+              <a:buNone/>
+            </a:pPr>
+            <a:r>
+              <a:rPr lang="en-US" sz="1400" b="1" dirty="0">
+                <a:solidFill>
+                  <a:srgbClr val="1B2A41"/>
+                </a:solidFill>
+                <a:latin typeface="Calibri" pitchFamily="34" charset="0"/>
+                <a:ea typeface="Calibri" pitchFamily="34" charset="-122"/>
+                <a:cs typeface="Calibri" pitchFamily="34" charset="-120"/>
+              </a:rPr>
+              <a:t>Evaluate</a:t>
+            </a:r>
+            <a:endParaRPr lang="en-US" sz="1400" dirty="0"/>
+          </a:p>
+          <a:p>
+            <a:pPr indent="0" marL="0">
+              <a:buNone/>
+            </a:pPr>
+            <a:r>
+              <a:rPr lang="en-US" sz="1100" dirty="0">
                 <a:solidFill>
                   <a:srgbClr val="2B3440"/>
                 </a:solidFill>
@@ -4980,9 +5524,701 @@
                 <a:ea typeface="Calibri" pitchFamily="34" charset="-122"/>
                 <a:cs typeface="Calibri" pitchFamily="34" charset="-120"/>
               </a:rPr>
-              <a:t>Report the test AUC and coefficients after running the script in the cluster.</a:t>
-            </a:r>
-            <a:endParaRPr lang="en-US" sz="1700" dirty="0"/>
+              <a:t>Test AUC (areaUnderROC); feature coefficients shown via pandas</a:t>
+            </a:r>
+            <a:endParaRPr lang="en-US" sz="1400" dirty="0"/>
+          </a:p>
+        </p:txBody>
+      </p:sp>
+      <p:sp>
+        <p:nvSpPr>
+          <p:cNvPr id="24" name="Shape 22"/>
+          <p:cNvSpPr/>
+          <p:nvPr/>
+        </p:nvSpPr>
+        <p:spPr>
+          <a:xfrm>
+            <a:off x="4663440" y="3383280"/>
+            <a:ext cx="3931920" cy="1005840"/>
+          </a:xfrm>
+          <a:prstGeom prst="rect">
+            <a:avLst/>
+          </a:prstGeom>
+          <a:solidFill>
+            <a:srgbClr val="F4F7FA"/>
+          </a:solidFill>
+          <a:ln w="12700">
+            <a:solidFill>
+              <a:srgbClr val="F4F7FA"/>
+            </a:solidFill>
+            <a:prstDash val="solid"/>
+          </a:ln>
+        </p:spPr>
+      </p:sp>
+      <p:sp>
+        <p:nvSpPr>
+          <p:cNvPr id="25" name="Shape 23"/>
+          <p:cNvSpPr/>
+          <p:nvPr/>
+        </p:nvSpPr>
+        <p:spPr>
+          <a:xfrm>
+            <a:off x="4800600" y="3657600"/>
+            <a:ext cx="457200" cy="457200"/>
+          </a:xfrm>
+          <a:prstGeom prst="ellipse">
+            <a:avLst/>
+          </a:prstGeom>
+          <a:solidFill>
+            <a:srgbClr val="0F8B8D"/>
+          </a:solidFill>
+          <a:ln w="12700">
+            <a:solidFill>
+              <a:srgbClr val="0F8B8D"/>
+            </a:solidFill>
+            <a:prstDash val="solid"/>
+          </a:ln>
+        </p:spPr>
+      </p:sp>
+      <p:sp>
+        <p:nvSpPr>
+          <p:cNvPr id="26" name="Text 24"/>
+          <p:cNvSpPr txBox="1"/>
+          <p:nvPr/>
+        </p:nvSpPr>
+        <p:spPr>
+          <a:xfrm>
+            <a:off x="4800600" y="3657600"/>
+            <a:ext cx="457200" cy="457200"/>
+          </a:xfrm>
+          <a:prstGeom prst="rect">
+            <a:avLst/>
+          </a:prstGeom>
+          <a:noFill/>
+          <a:ln/>
+        </p:spPr>
+        <p:txBody>
+          <a:bodyPr wrap="square" lIns="0" tIns="0" rIns="0" bIns="0" rtlCol="0" anchor="ctr"/>
+          <a:lstStyle/>
+          <a:p>
+            <a:pPr algn="ctr" indent="0" marL="0">
+              <a:buNone/>
+            </a:pPr>
+            <a:r>
+              <a:rPr lang="en-US" sz="1600" b="1" dirty="0">
+                <a:solidFill>
+                  <a:srgbClr val="FFFFFF"/>
+                </a:solidFill>
+                <a:latin typeface="Calibri" pitchFamily="34" charset="0"/>
+                <a:ea typeface="Calibri" pitchFamily="34" charset="-122"/>
+                <a:cs typeface="Calibri" pitchFamily="34" charset="-120"/>
+              </a:rPr>
+              <a:t>6</a:t>
+            </a:r>
+            <a:endParaRPr lang="en-US" sz="1600" dirty="0"/>
+          </a:p>
+        </p:txBody>
+      </p:sp>
+      <p:sp>
+        <p:nvSpPr>
+          <p:cNvPr id="27" name="Text 25"/>
+          <p:cNvSpPr txBox="1"/>
+          <p:nvPr/>
+        </p:nvSpPr>
+        <p:spPr>
+          <a:xfrm>
+            <a:off x="5394960" y="3383280"/>
+            <a:ext cx="3108960" cy="1005840"/>
+          </a:xfrm>
+          <a:prstGeom prst="rect">
+            <a:avLst/>
+          </a:prstGeom>
+          <a:noFill/>
+          <a:ln/>
+        </p:spPr>
+        <p:txBody>
+          <a:bodyPr wrap="square" lIns="0" tIns="0" rIns="0" bIns="0" rtlCol="0" anchor="ctr"/>
+          <a:lstStyle/>
+          <a:p>
+            <a:pPr indent="0" marL="0">
+              <a:buNone/>
+            </a:pPr>
+            <a:r>
+              <a:rPr lang="en-US" sz="1400" b="1" dirty="0">
+                <a:solidFill>
+                  <a:srgbClr val="1B2A41"/>
+                </a:solidFill>
+                <a:latin typeface="Calibri" pitchFamily="34" charset="0"/>
+                <a:ea typeface="Calibri" pitchFamily="34" charset="-122"/>
+                <a:cs typeface="Calibri" pitchFamily="34" charset="-120"/>
+              </a:rPr>
+              <a:t>Save</a:t>
+            </a:r>
+            <a:endParaRPr lang="en-US" sz="1400" dirty="0"/>
+          </a:p>
+          <a:p>
+            <a:pPr indent="0" marL="0">
+              <a:buNone/>
+            </a:pPr>
+            <a:r>
+              <a:rPr lang="en-US" sz="1100" dirty="0">
+                <a:solidFill>
+                  <a:srgbClr val="2B3440"/>
+                </a:solidFill>
+                <a:latin typeface="Calibri" pitchFamily="34" charset="0"/>
+                <a:ea typeface="Calibri" pitchFamily="34" charset="-122"/>
+                <a:cs typeface="Calibri" pitchFamily="34" charset="-120"/>
+              </a:rPr>
+              <a:t>Write claim, probability, prediction to Parquet in /insurance/results</a:t>
+            </a:r>
+            <a:endParaRPr lang="en-US" sz="1400" dirty="0"/>
+          </a:p>
+        </p:txBody>
+      </p:sp>
+    </p:spTree>
+  </p:cSld>
+  <p:clrMapOvr>
+    <a:masterClrMapping/>
+  </p:clrMapOvr>
+</p:sld>
+</file>
+
+<file path=ppt/slides/slide9.xml><?xml version="1.0" encoding="utf-8"?>
+<p:sld xmlns:a="http://schemas.openxmlformats.org/drawingml/2006/main" xmlns:r="http://schemas.openxmlformats.org/officeDocument/2006/relationships" xmlns:p="http://schemas.openxmlformats.org/presentationml/2006/main">
+  <p:cSld name="Slide 9">
+    <p:bg>
+      <p:bgPr>
+        <a:solidFill>
+          <a:srgbClr val="FFFFFF"/>
+        </a:solidFill>
+      </p:bgPr>
+    </p:bg>
+    <p:spTree>
+      <p:nvGrpSpPr>
+        <p:cNvPr id="1" name=""/>
+        <p:cNvGrpSpPr/>
+        <p:nvPr/>
+      </p:nvGrpSpPr>
+      <p:grpSpPr>
+        <a:xfrm>
+          <a:off x="0" y="0"/>
+          <a:ext cx="0" cy="0"/>
+          <a:chOff x="0" y="0"/>
+          <a:chExt cx="0" cy="0"/>
+        </a:xfrm>
+      </p:grpSpPr>
+      <p:sp>
+        <p:nvSpPr>
+          <p:cNvPr id="2" name="Shape 0"/>
+          <p:cNvSpPr/>
+          <p:nvPr/>
+        </p:nvSpPr>
+        <p:spPr>
+          <a:xfrm>
+            <a:off x="0" y="0"/>
+            <a:ext cx="164592" cy="5143500"/>
+          </a:xfrm>
+          <a:prstGeom prst="rect">
+            <a:avLst/>
+          </a:prstGeom>
+          <a:solidFill>
+            <a:srgbClr val="0F8B8D"/>
+          </a:solidFill>
+          <a:ln w="12700">
+            <a:solidFill>
+              <a:srgbClr val="0F8B8D"/>
+            </a:solidFill>
+            <a:prstDash val="solid"/>
+          </a:ln>
+        </p:spPr>
+      </p:sp>
+      <p:sp>
+        <p:nvSpPr>
+          <p:cNvPr id="3" name="Text 1"/>
+          <p:cNvSpPr txBox="1"/>
+          <p:nvPr/>
+        </p:nvSpPr>
+        <p:spPr>
+          <a:xfrm>
+            <a:off x="548640" y="274320"/>
+            <a:ext cx="8046720" cy="640080"/>
+          </a:xfrm>
+          <a:prstGeom prst="rect">
+            <a:avLst/>
+          </a:prstGeom>
+          <a:noFill/>
+          <a:ln/>
+        </p:spPr>
+        <p:txBody>
+          <a:bodyPr wrap="square" lIns="0" tIns="0" rIns="0" bIns="0" rtlCol="0" anchor="ctr"/>
+          <a:lstStyle/>
+          <a:p>
+            <a:pPr indent="0" marL="0">
+              <a:buNone/>
+            </a:pPr>
+            <a:r>
+              <a:rPr lang="en-US" sz="2800" b="1" dirty="0">
+                <a:solidFill>
+                  <a:srgbClr val="1B2A41"/>
+                </a:solidFill>
+                <a:latin typeface="Calibri" pitchFamily="34" charset="0"/>
+                <a:ea typeface="Calibri" pitchFamily="34" charset="-122"/>
+                <a:cs typeface="Calibri" pitchFamily="34" charset="-120"/>
+              </a:rPr>
+              <a:t>Project deliverables and run order</a:t>
+            </a:r>
+            <a:endParaRPr lang="en-US" sz="2800" dirty="0"/>
+          </a:p>
+        </p:txBody>
+      </p:sp>
+      <p:sp>
+        <p:nvSpPr>
+          <p:cNvPr id="4" name="Shape 2"/>
+          <p:cNvSpPr/>
+          <p:nvPr/>
+        </p:nvSpPr>
+        <p:spPr>
+          <a:xfrm>
+            <a:off x="548640" y="1097280"/>
+            <a:ext cx="8046720" cy="640080"/>
+          </a:xfrm>
+          <a:prstGeom prst="rect">
+            <a:avLst/>
+          </a:prstGeom>
+          <a:solidFill>
+            <a:srgbClr val="F4F7FA"/>
+          </a:solidFill>
+          <a:ln w="12700">
+            <a:solidFill>
+              <a:srgbClr val="F4F7FA"/>
+            </a:solidFill>
+            <a:prstDash val="solid"/>
+          </a:ln>
+        </p:spPr>
+      </p:sp>
+      <p:sp>
+        <p:nvSpPr>
+          <p:cNvPr id="5" name="Text 3"/>
+          <p:cNvSpPr txBox="1"/>
+          <p:nvPr/>
+        </p:nvSpPr>
+        <p:spPr>
+          <a:xfrm>
+            <a:off x="731520" y="1097280"/>
+            <a:ext cx="2377440" cy="640080"/>
+          </a:xfrm>
+          <a:prstGeom prst="rect">
+            <a:avLst/>
+          </a:prstGeom>
+          <a:noFill/>
+          <a:ln/>
+        </p:spPr>
+        <p:txBody>
+          <a:bodyPr wrap="square" lIns="0" tIns="0" rIns="0" bIns="0" rtlCol="0" anchor="ctr"/>
+          <a:lstStyle/>
+          <a:p>
+            <a:pPr indent="0" marL="0">
+              <a:buNone/>
+            </a:pPr>
+            <a:r>
+              <a:rPr lang="en-US" sz="1400" b="1" dirty="0">
+                <a:solidFill>
+                  <a:srgbClr val="0F8B8D"/>
+                </a:solidFill>
+                <a:latin typeface="Calibri" pitchFamily="34" charset="0"/>
+                <a:ea typeface="Calibri" pitchFamily="34" charset="-122"/>
+                <a:cs typeface="Calibri" pitchFamily="34" charset="-120"/>
+              </a:rPr>
+              <a:t>Insurance.csv</a:t>
+            </a:r>
+            <a:endParaRPr lang="en-US" sz="1400" dirty="0"/>
+          </a:p>
+        </p:txBody>
+      </p:sp>
+      <p:sp>
+        <p:nvSpPr>
+          <p:cNvPr id="6" name="Text 4"/>
+          <p:cNvSpPr txBox="1"/>
+          <p:nvPr/>
+        </p:nvSpPr>
+        <p:spPr>
+          <a:xfrm>
+            <a:off x="3200400" y="1097280"/>
+            <a:ext cx="5303520" cy="640080"/>
+          </a:xfrm>
+          <a:prstGeom prst="rect">
+            <a:avLst/>
+          </a:prstGeom>
+          <a:noFill/>
+          <a:ln/>
+        </p:spPr>
+        <p:txBody>
+          <a:bodyPr wrap="square" lIns="0" tIns="0" rIns="0" bIns="0" rtlCol="0" anchor="ctr"/>
+          <a:lstStyle/>
+          <a:p>
+            <a:pPr indent="0" marL="0">
+              <a:buNone/>
+            </a:pPr>
+            <a:r>
+              <a:rPr lang="en-US" sz="1300" dirty="0">
+                <a:solidFill>
+                  <a:srgbClr val="2B3440"/>
+                </a:solidFill>
+                <a:latin typeface="Calibri" pitchFamily="34" charset="0"/>
+                <a:ea typeface="Calibri" pitchFamily="34" charset="-122"/>
+                <a:cs typeface="Calibri" pitchFamily="34" charset="-120"/>
+              </a:rPr>
+              <a:t>Raw dataset, ingested to HDFS at /insurance/data</a:t>
+            </a:r>
+            <a:endParaRPr lang="en-US" sz="1300" dirty="0"/>
+          </a:p>
+        </p:txBody>
+      </p:sp>
+      <p:sp>
+        <p:nvSpPr>
+          <p:cNvPr id="7" name="Shape 5"/>
+          <p:cNvSpPr/>
+          <p:nvPr/>
+        </p:nvSpPr>
+        <p:spPr>
+          <a:xfrm>
+            <a:off x="548640" y="1874520"/>
+            <a:ext cx="8046720" cy="640080"/>
+          </a:xfrm>
+          <a:prstGeom prst="rect">
+            <a:avLst/>
+          </a:prstGeom>
+          <a:solidFill>
+            <a:srgbClr val="F4F7FA"/>
+          </a:solidFill>
+          <a:ln w="12700">
+            <a:solidFill>
+              <a:srgbClr val="F4F7FA"/>
+            </a:solidFill>
+            <a:prstDash val="solid"/>
+          </a:ln>
+        </p:spPr>
+      </p:sp>
+      <p:sp>
+        <p:nvSpPr>
+          <p:cNvPr id="8" name="Text 6"/>
+          <p:cNvSpPr txBox="1"/>
+          <p:nvPr/>
+        </p:nvSpPr>
+        <p:spPr>
+          <a:xfrm>
+            <a:off x="731520" y="1874520"/>
+            <a:ext cx="2377440" cy="640080"/>
+          </a:xfrm>
+          <a:prstGeom prst="rect">
+            <a:avLst/>
+          </a:prstGeom>
+          <a:noFill/>
+          <a:ln/>
+        </p:spPr>
+        <p:txBody>
+          <a:bodyPr wrap="square" lIns="0" tIns="0" rIns="0" bIns="0" rtlCol="0" anchor="ctr"/>
+          <a:lstStyle/>
+          <a:p>
+            <a:pPr indent="0" marL="0">
+              <a:buNone/>
+            </a:pPr>
+            <a:r>
+              <a:rPr lang="en-US" sz="1400" b="1" dirty="0">
+                <a:solidFill>
+                  <a:srgbClr val="0F8B8D"/>
+                </a:solidFill>
+                <a:latin typeface="Calibri" pitchFamily="34" charset="0"/>
+                <a:ea typeface="Calibri" pitchFamily="34" charset="-122"/>
+                <a:cs typeface="Calibri" pitchFamily="34" charset="-120"/>
+              </a:rPr>
+              <a:t>hive_queries.sql</a:t>
+            </a:r>
+            <a:endParaRPr lang="en-US" sz="1400" dirty="0"/>
+          </a:p>
+        </p:txBody>
+      </p:sp>
+      <p:sp>
+        <p:nvSpPr>
+          <p:cNvPr id="9" name="Text 7"/>
+          <p:cNvSpPr txBox="1"/>
+          <p:nvPr/>
+        </p:nvSpPr>
+        <p:spPr>
+          <a:xfrm>
+            <a:off x="3200400" y="1874520"/>
+            <a:ext cx="5303520" cy="640080"/>
+          </a:xfrm>
+          <a:prstGeom prst="rect">
+            <a:avLst/>
+          </a:prstGeom>
+          <a:noFill/>
+          <a:ln/>
+        </p:spPr>
+        <p:txBody>
+          <a:bodyPr wrap="square" lIns="0" tIns="0" rIns="0" bIns="0" rtlCol="0" anchor="ctr"/>
+          <a:lstStyle/>
+          <a:p>
+            <a:pPr indent="0" marL="0">
+              <a:buNone/>
+            </a:pPr>
+            <a:r>
+              <a:rPr lang="en-US" sz="1300" dirty="0">
+                <a:solidFill>
+                  <a:srgbClr val="2B3440"/>
+                </a:solidFill>
+                <a:latin typeface="Calibri" pitchFamily="34" charset="0"/>
+                <a:ea typeface="Calibri" pitchFamily="34" charset="-122"/>
+                <a:cs typeface="Calibri" pitchFamily="34" charset="-120"/>
+              </a:rPr>
+              <a:t>Creates insurance_db, external table and the smoker/claim analysis</a:t>
+            </a:r>
+            <a:endParaRPr lang="en-US" sz="1300" dirty="0"/>
+          </a:p>
+        </p:txBody>
+      </p:sp>
+      <p:sp>
+        <p:nvSpPr>
+          <p:cNvPr id="10" name="Shape 8"/>
+          <p:cNvSpPr/>
+          <p:nvPr/>
+        </p:nvSpPr>
+        <p:spPr>
+          <a:xfrm>
+            <a:off x="548640" y="2651760"/>
+            <a:ext cx="8046720" cy="640080"/>
+          </a:xfrm>
+          <a:prstGeom prst="rect">
+            <a:avLst/>
+          </a:prstGeom>
+          <a:solidFill>
+            <a:srgbClr val="F4F7FA"/>
+          </a:solidFill>
+          <a:ln w="12700">
+            <a:solidFill>
+              <a:srgbClr val="F4F7FA"/>
+            </a:solidFill>
+            <a:prstDash val="solid"/>
+          </a:ln>
+        </p:spPr>
+      </p:sp>
+      <p:sp>
+        <p:nvSpPr>
+          <p:cNvPr id="11" name="Text 9"/>
+          <p:cNvSpPr txBox="1"/>
+          <p:nvPr/>
+        </p:nvSpPr>
+        <p:spPr>
+          <a:xfrm>
+            <a:off x="731520" y="2651760"/>
+            <a:ext cx="2377440" cy="640080"/>
+          </a:xfrm>
+          <a:prstGeom prst="rect">
+            <a:avLst/>
+          </a:prstGeom>
+          <a:noFill/>
+          <a:ln/>
+        </p:spPr>
+        <p:txBody>
+          <a:bodyPr wrap="square" lIns="0" tIns="0" rIns="0" bIns="0" rtlCol="0" anchor="ctr"/>
+          <a:lstStyle/>
+          <a:p>
+            <a:pPr indent="0" marL="0">
+              <a:buNone/>
+            </a:pPr>
+            <a:r>
+              <a:rPr lang="en-US" sz="1400" b="1" dirty="0">
+                <a:solidFill>
+                  <a:srgbClr val="0F8B8D"/>
+                </a:solidFill>
+                <a:latin typeface="Calibri" pitchFamily="34" charset="0"/>
+                <a:ea typeface="Calibri" pitchFamily="34" charset="-122"/>
+                <a:cs typeface="Calibri" pitchFamily="34" charset="-120"/>
+              </a:rPr>
+              <a:t>insurance_model.py</a:t>
+            </a:r>
+            <a:endParaRPr lang="en-US" sz="1400" dirty="0"/>
+          </a:p>
+        </p:txBody>
+      </p:sp>
+      <p:sp>
+        <p:nvSpPr>
+          <p:cNvPr id="12" name="Text 10"/>
+          <p:cNvSpPr txBox="1"/>
+          <p:nvPr/>
+        </p:nvSpPr>
+        <p:spPr>
+          <a:xfrm>
+            <a:off x="3200400" y="2651760"/>
+            <a:ext cx="5303520" cy="640080"/>
+          </a:xfrm>
+          <a:prstGeom prst="rect">
+            <a:avLst/>
+          </a:prstGeom>
+          <a:noFill/>
+          <a:ln/>
+        </p:spPr>
+        <p:txBody>
+          <a:bodyPr wrap="square" lIns="0" tIns="0" rIns="0" bIns="0" rtlCol="0" anchor="ctr"/>
+          <a:lstStyle/>
+          <a:p>
+            <a:pPr indent="0" marL="0">
+              <a:buNone/>
+            </a:pPr>
+            <a:r>
+              <a:rPr lang="en-US" sz="1300" dirty="0">
+                <a:solidFill>
+                  <a:srgbClr val="2B3440"/>
+                </a:solidFill>
+                <a:latin typeface="Calibri" pitchFamily="34" charset="0"/>
+                <a:ea typeface="Calibri" pitchFamily="34" charset="-122"/>
+                <a:cs typeface="Calibri" pitchFamily="34" charset="-120"/>
+              </a:rPr>
+              <a:t>PySpark logistic regression, AUC, coefficients, Parquet output</a:t>
+            </a:r>
+            <a:endParaRPr lang="en-US" sz="1300" dirty="0"/>
+          </a:p>
+        </p:txBody>
+      </p:sp>
+      <p:sp>
+        <p:nvSpPr>
+          <p:cNvPr id="13" name="Shape 11"/>
+          <p:cNvSpPr/>
+          <p:nvPr/>
+        </p:nvSpPr>
+        <p:spPr>
+          <a:xfrm>
+            <a:off x="548640" y="3429000"/>
+            <a:ext cx="8046720" cy="640080"/>
+          </a:xfrm>
+          <a:prstGeom prst="rect">
+            <a:avLst/>
+          </a:prstGeom>
+          <a:solidFill>
+            <a:srgbClr val="F4F7FA"/>
+          </a:solidFill>
+          <a:ln w="12700">
+            <a:solidFill>
+              <a:srgbClr val="F4F7FA"/>
+            </a:solidFill>
+            <a:prstDash val="solid"/>
+          </a:ln>
+        </p:spPr>
+      </p:sp>
+      <p:sp>
+        <p:nvSpPr>
+          <p:cNvPr id="14" name="Text 12"/>
+          <p:cNvSpPr txBox="1"/>
+          <p:nvPr/>
+        </p:nvSpPr>
+        <p:spPr>
+          <a:xfrm>
+            <a:off x="731520" y="3429000"/>
+            <a:ext cx="2377440" cy="640080"/>
+          </a:xfrm>
+          <a:prstGeom prst="rect">
+            <a:avLst/>
+          </a:prstGeom>
+          <a:noFill/>
+          <a:ln/>
+        </p:spPr>
+        <p:txBody>
+          <a:bodyPr wrap="square" lIns="0" tIns="0" rIns="0" bIns="0" rtlCol="0" anchor="ctr"/>
+          <a:lstStyle/>
+          <a:p>
+            <a:pPr indent="0" marL="0">
+              <a:buNone/>
+            </a:pPr>
+            <a:r>
+              <a:rPr lang="en-US" sz="1400" b="1" dirty="0">
+                <a:solidFill>
+                  <a:srgbClr val="0F8B8D"/>
+                </a:solidFill>
+                <a:latin typeface="Calibri" pitchFamily="34" charset="0"/>
+                <a:ea typeface="Calibri" pitchFamily="34" charset="-122"/>
+                <a:cs typeface="Calibri" pitchFamily="34" charset="-120"/>
+              </a:rPr>
+              <a:t>README.md</a:t>
+            </a:r>
+            <a:endParaRPr lang="en-US" sz="1400" dirty="0"/>
+          </a:p>
+        </p:txBody>
+      </p:sp>
+      <p:sp>
+        <p:nvSpPr>
+          <p:cNvPr id="15" name="Text 13"/>
+          <p:cNvSpPr txBox="1"/>
+          <p:nvPr/>
+        </p:nvSpPr>
+        <p:spPr>
+          <a:xfrm>
+            <a:off x="3200400" y="3429000"/>
+            <a:ext cx="5303520" cy="640080"/>
+          </a:xfrm>
+          <a:prstGeom prst="rect">
+            <a:avLst/>
+          </a:prstGeom>
+          <a:noFill/>
+          <a:ln/>
+        </p:spPr>
+        <p:txBody>
+          <a:bodyPr wrap="square" lIns="0" tIns="0" rIns="0" bIns="0" rtlCol="0" anchor="ctr"/>
+          <a:lstStyle/>
+          <a:p>
+            <a:pPr indent="0" marL="0">
+              <a:buNone/>
+            </a:pPr>
+            <a:r>
+              <a:rPr lang="en-US" sz="1300" dirty="0">
+                <a:solidFill>
+                  <a:srgbClr val="2B3440"/>
+                </a:solidFill>
+                <a:latin typeface="Calibri" pitchFamily="34" charset="0"/>
+                <a:ea typeface="Calibri" pitchFamily="34" charset="-122"/>
+                <a:cs typeface="Calibri" pitchFamily="34" charset="-120"/>
+              </a:rPr>
+              <a:t>Business problem, dataset, architecture and setup steps</a:t>
+            </a:r>
+            <a:endParaRPr lang="en-US" sz="1300" dirty="0"/>
+          </a:p>
+        </p:txBody>
+      </p:sp>
+      <p:sp>
+        <p:nvSpPr>
+          <p:cNvPr id="16" name="Text 14"/>
+          <p:cNvSpPr txBox="1"/>
+          <p:nvPr/>
+        </p:nvSpPr>
+        <p:spPr>
+          <a:xfrm>
+            <a:off x="548640" y="4297680"/>
+            <a:ext cx="8046720" cy="457200"/>
+          </a:xfrm>
+          <a:prstGeom prst="rect">
+            <a:avLst/>
+          </a:prstGeom>
+          <a:noFill/>
+          <a:ln/>
+        </p:spPr>
+        <p:txBody>
+          <a:bodyPr wrap="square" lIns="0" tIns="0" rIns="0" bIns="0" rtlCol="0" anchor="ctr"/>
+          <a:lstStyle/>
+          <a:p>
+            <a:pPr indent="0" marL="0">
+              <a:buNone/>
+            </a:pPr>
+            <a:r>
+              <a:rPr lang="en-US" sz="1200" i="1" dirty="0">
+                <a:solidFill>
+                  <a:srgbClr val="5C6B7A"/>
+                </a:solidFill>
+                <a:latin typeface="Calibri" pitchFamily="34" charset="0"/>
+                <a:ea typeface="Calibri" pitchFamily="34" charset="-122"/>
+                <a:cs typeface="Calibri" pitchFamily="34" charset="-120"/>
+              </a:rPr>
+              <a:t>Run order: start Docker stack &gt; upload CSV to HDFS &gt; create Hive table &gt; run PySpark script &gt; read results from /insurance/results</a:t>
+            </a:r>
+            <a:endParaRPr lang="en-US" sz="1200" dirty="0"/>
           </a:p>
         </p:txBody>
       </p:sp>
